--- a/courses/nus1/files/slides/W01.pptx
+++ b/courses/nus1/files/slides/W01.pptx
@@ -5,18 +5,19 @@
     <p:sldMasterId id="2147483648" r:id="rId1"/>
   </p:sldMasterIdLst>
   <p:notesMasterIdLst>
-    <p:notesMasterId r:id="rId11"/>
+    <p:notesMasterId r:id="rId12"/>
   </p:notesMasterIdLst>
   <p:sldIdLst>
     <p:sldId id="256" r:id="rId2"/>
     <p:sldId id="257" r:id="rId3"/>
     <p:sldId id="264" r:id="rId4"/>
     <p:sldId id="258" r:id="rId5"/>
-    <p:sldId id="259" r:id="rId6"/>
-    <p:sldId id="260" r:id="rId7"/>
-    <p:sldId id="261" r:id="rId8"/>
-    <p:sldId id="262" r:id="rId9"/>
-    <p:sldId id="263" r:id="rId10"/>
+    <p:sldId id="265" r:id="rId6"/>
+    <p:sldId id="266" r:id="rId7"/>
+    <p:sldId id="259" r:id="rId8"/>
+    <p:sldId id="267" r:id="rId9"/>
+    <p:sldId id="269" r:id="rId10"/>
+    <p:sldId id="262" r:id="rId11"/>
   </p:sldIdLst>
   <p:sldSz cx="12192000" cy="6858000"/>
   <p:notesSz cx="6858000" cy="9144000"/>
@@ -329,6 +330,76 @@
 </p:notes>
 </file>
 
+<file path=ppt/notesSlides/notesSlide10.xml><?xml version="1.0" encoding="utf-8"?>
+<p:notes xmlns:a="http://schemas.openxmlformats.org/drawingml/2006/main" xmlns:r="http://schemas.openxmlformats.org/officeDocument/2006/relationships" xmlns:p="http://schemas.openxmlformats.org/presentationml/2006/main">
+  <p:cSld>
+    <p:spTree>
+      <p:nvGrpSpPr>
+        <p:cNvPr id="1" name=""/>
+        <p:cNvGrpSpPr/>
+        <p:nvPr/>
+      </p:nvGrpSpPr>
+      <p:grpSpPr>
+        <a:xfrm>
+          <a:off x="0" y="0"/>
+          <a:ext cx="0" cy="0"/>
+          <a:chOff x="0" y="0"/>
+          <a:chExt cx="0" cy="0"/>
+        </a:xfrm>
+      </p:grpSpPr>
+      <p:sp>
+        <p:nvSpPr>
+          <p:cNvPr id="2" name="Slide Image Placeholder 1"/>
+          <p:cNvSpPr>
+            <a:spLocks noGrp="1" noRot="1" noChangeAspect="1"/>
+          </p:cNvSpPr>
+          <p:nvPr>
+            <p:ph type="sldImg" idx="2"/>
+          </p:nvPr>
+        </p:nvSpPr>
+        <p:spPr/>
+      </p:sp>
+      <p:sp>
+        <p:nvSpPr>
+          <p:cNvPr id="3" name="Notes Placeholder 2"/>
+          <p:cNvSpPr>
+            <a:spLocks noGrp="1"/>
+          </p:cNvSpPr>
+          <p:nvPr>
+            <p:ph type="body" sz="quarter" idx="3"/>
+          </p:nvPr>
+        </p:nvSpPr>
+        <p:spPr/>
+        <p:txBody>
+          <a:bodyPr/>
+          <a:lstStyle/>
+          <a:p>
+            <a:r>
+              <a:t>Optional: QR-Code oder kurzer Link zum Fragen-Tool.</a:t>
+            </a:r>
+          </a:p>
+        </p:txBody>
+      </p:sp>
+      <p:sp>
+        <p:nvSpPr>
+          <p:cNvPr id="4" name="Slide Number Placeholder 3"/>
+          <p:cNvSpPr>
+            <a:spLocks noGrp="1"/>
+          </p:cNvSpPr>
+          <p:nvPr>
+            <p:ph type="sldNum" sz="quarter" idx="5"/>
+          </p:nvPr>
+        </p:nvSpPr>
+        <p:spPr/>
+      </p:sp>
+    </p:spTree>
+  </p:cSld>
+  <p:clrMapOvr>
+    <a:masterClrMapping/>
+  </p:clrMapOvr>
+</p:notes>
+</file>
+
 <file path=ppt/notesSlides/notesSlide2.xml><?xml version="1.0" encoding="utf-8"?>
 <p:notes xmlns:a="http://schemas.openxmlformats.org/drawingml/2006/main" xmlns:r="http://schemas.openxmlformats.org/officeDocument/2006/relationships" xmlns:p="http://schemas.openxmlformats.org/presentationml/2006/main">
   <p:cSld>
@@ -573,7 +644,13 @@
   <p:cSld>
     <p:spTree>
       <p:nvGrpSpPr>
-        <p:cNvPr id="1" name=""/>
+        <p:cNvPr id="1" name="">
+          <a:extLst>
+            <a:ext uri="{FF2B5EF4-FFF2-40B4-BE49-F238E27FC236}">
+              <a16:creationId xmlns:a16="http://schemas.microsoft.com/office/drawing/2014/main" id="{34301CDF-842F-8F63-F7AD-25630049EF7C}"/>
+            </a:ext>
+          </a:extLst>
+        </p:cNvPr>
         <p:cNvGrpSpPr/>
         <p:nvPr/>
       </p:nvGrpSpPr>
@@ -587,7 +664,13 @@
       </p:grpSpPr>
       <p:sp>
         <p:nvSpPr>
-          <p:cNvPr id="2" name="Slide Image Placeholder 1"/>
+          <p:cNvPr id="2" name="Slide Image Placeholder 1">
+            <a:extLst>
+              <a:ext uri="{FF2B5EF4-FFF2-40B4-BE49-F238E27FC236}">
+                <a16:creationId xmlns:a16="http://schemas.microsoft.com/office/drawing/2014/main" id="{616DE027-D5DF-AC0F-55F5-42E4ABDEA640}"/>
+              </a:ext>
+            </a:extLst>
+          </p:cNvPr>
           <p:cNvSpPr>
             <a:spLocks noGrp="1" noRot="1" noChangeAspect="1"/>
           </p:cNvSpPr>
@@ -599,7 +682,13 @@
       </p:sp>
       <p:sp>
         <p:nvSpPr>
-          <p:cNvPr id="3" name="Notes Placeholder 2"/>
+          <p:cNvPr id="3" name="Notes Placeholder 2">
+            <a:extLst>
+              <a:ext uri="{FF2B5EF4-FFF2-40B4-BE49-F238E27FC236}">
+                <a16:creationId xmlns:a16="http://schemas.microsoft.com/office/drawing/2014/main" id="{93368EFA-F790-612B-8CEC-EBD48355F3B2}"/>
+              </a:ext>
+            </a:extLst>
+          </p:cNvPr>
           <p:cNvSpPr>
             <a:spLocks noGrp="1"/>
           </p:cNvSpPr>
@@ -620,7 +709,13 @@
       </p:sp>
       <p:sp>
         <p:nvSpPr>
-          <p:cNvPr id="4" name="Slide Number Placeholder 3"/>
+          <p:cNvPr id="4" name="Slide Number Placeholder 3">
+            <a:extLst>
+              <a:ext uri="{FF2B5EF4-FFF2-40B4-BE49-F238E27FC236}">
+                <a16:creationId xmlns:a16="http://schemas.microsoft.com/office/drawing/2014/main" id="{889B9DC6-FCC0-323A-09FE-7527059CC8B9}"/>
+              </a:ext>
+            </a:extLst>
+          </p:cNvPr>
           <p:cNvSpPr>
             <a:spLocks noGrp="1"/>
           </p:cNvSpPr>
@@ -631,6 +726,11 @@
         <p:spPr/>
       </p:sp>
     </p:spTree>
+    <p:extLst>
+      <p:ext uri="{BB962C8B-B14F-4D97-AF65-F5344CB8AC3E}">
+        <p14:creationId xmlns:p14="http://schemas.microsoft.com/office/powerpoint/2010/main" val="879129202"/>
+      </p:ext>
+    </p:extLst>
   </p:cSld>
   <p:clrMapOvr>
     <a:masterClrMapping/>
@@ -643,7 +743,13 @@
   <p:cSld>
     <p:spTree>
       <p:nvGrpSpPr>
-        <p:cNvPr id="1" name=""/>
+        <p:cNvPr id="1" name="">
+          <a:extLst>
+            <a:ext uri="{FF2B5EF4-FFF2-40B4-BE49-F238E27FC236}">
+              <a16:creationId xmlns:a16="http://schemas.microsoft.com/office/drawing/2014/main" id="{C23C236B-A43D-AAA2-392E-2DCF9E33CF58}"/>
+            </a:ext>
+          </a:extLst>
+        </p:cNvPr>
         <p:cNvGrpSpPr/>
         <p:nvPr/>
       </p:nvGrpSpPr>
@@ -657,7 +763,13 @@
       </p:grpSpPr>
       <p:sp>
         <p:nvSpPr>
-          <p:cNvPr id="2" name="Slide Image Placeholder 1"/>
+          <p:cNvPr id="2" name="Slide Image Placeholder 1">
+            <a:extLst>
+              <a:ext uri="{FF2B5EF4-FFF2-40B4-BE49-F238E27FC236}">
+                <a16:creationId xmlns:a16="http://schemas.microsoft.com/office/drawing/2014/main" id="{5E12129B-0401-FCA8-7E3A-44FA15D788E8}"/>
+              </a:ext>
+            </a:extLst>
+          </p:cNvPr>
           <p:cNvSpPr>
             <a:spLocks noGrp="1" noRot="1" noChangeAspect="1"/>
           </p:cNvSpPr>
@@ -669,7 +781,13 @@
       </p:sp>
       <p:sp>
         <p:nvSpPr>
-          <p:cNvPr id="3" name="Notes Placeholder 2"/>
+          <p:cNvPr id="3" name="Notes Placeholder 2">
+            <a:extLst>
+              <a:ext uri="{FF2B5EF4-FFF2-40B4-BE49-F238E27FC236}">
+                <a16:creationId xmlns:a16="http://schemas.microsoft.com/office/drawing/2014/main" id="{DD7769DE-3737-6F20-7D23-08032CA4FE84}"/>
+              </a:ext>
+            </a:extLst>
+          </p:cNvPr>
           <p:cNvSpPr>
             <a:spLocks noGrp="1"/>
           </p:cNvSpPr>
@@ -683,14 +801,20 @@
           <a:lstStyle/>
           <a:p>
             <a:r>
-              <a:t>Standard-Aufgabenfolie: links Aufgabe, rechts kurze Arbeitsanweisung. Lösung später oder live in GoodNotes.</a:t>
-            </a:r>
-          </a:p>
-        </p:txBody>
-      </p:sp>
-      <p:sp>
-        <p:nvSpPr>
-          <p:cNvPr id="4" name="Slide Number Placeholder 3"/>
+              <a:t>Für Schaltungen, Aufgaben, Diagramme oder Fotos. Viel Fläche lassen und in GoodNotes direkt darüber schreiben.</a:t>
+            </a:r>
+          </a:p>
+        </p:txBody>
+      </p:sp>
+      <p:sp>
+        <p:nvSpPr>
+          <p:cNvPr id="4" name="Slide Number Placeholder 3">
+            <a:extLst>
+              <a:ext uri="{FF2B5EF4-FFF2-40B4-BE49-F238E27FC236}">
+                <a16:creationId xmlns:a16="http://schemas.microsoft.com/office/drawing/2014/main" id="{7CA37121-B110-BF38-A28B-BCBA1F1D4801}"/>
+              </a:ext>
+            </a:extLst>
+          </p:cNvPr>
           <p:cNvSpPr>
             <a:spLocks noGrp="1"/>
           </p:cNvSpPr>
@@ -701,6 +825,11 @@
         <p:spPr/>
       </p:sp>
     </p:spTree>
+    <p:extLst>
+      <p:ext uri="{BB962C8B-B14F-4D97-AF65-F5344CB8AC3E}">
+        <p14:creationId xmlns:p14="http://schemas.microsoft.com/office/powerpoint/2010/main" val="1551775559"/>
+      </p:ext>
+    </p:extLst>
   </p:cSld>
   <p:clrMapOvr>
     <a:masterClrMapping/>
@@ -753,7 +882,7 @@
           <a:lstStyle/>
           <a:p>
             <a:r>
-              <a:t>Nur zwischen grösseren Blöcken verwenden, nicht ständig.</a:t>
+              <a:t>Für eine grosse Formel, einen Rechenweg oder eine Lösung. Nicht mit Text vollpacken.</a:t>
             </a:r>
           </a:p>
         </p:txBody>
@@ -783,7 +912,13 @@
   <p:cSld>
     <p:spTree>
       <p:nvGrpSpPr>
-        <p:cNvPr id="1" name=""/>
+        <p:cNvPr id="1" name="">
+          <a:extLst>
+            <a:ext uri="{FF2B5EF4-FFF2-40B4-BE49-F238E27FC236}">
+              <a16:creationId xmlns:a16="http://schemas.microsoft.com/office/drawing/2014/main" id="{09A8EDAF-DE46-EBFE-703A-933D254D10E9}"/>
+            </a:ext>
+          </a:extLst>
+        </p:cNvPr>
         <p:cNvGrpSpPr/>
         <p:nvPr/>
       </p:nvGrpSpPr>
@@ -797,7 +932,13 @@
       </p:grpSpPr>
       <p:sp>
         <p:nvSpPr>
-          <p:cNvPr id="2" name="Slide Image Placeholder 1"/>
+          <p:cNvPr id="2" name="Slide Image Placeholder 1">
+            <a:extLst>
+              <a:ext uri="{FF2B5EF4-FFF2-40B4-BE49-F238E27FC236}">
+                <a16:creationId xmlns:a16="http://schemas.microsoft.com/office/drawing/2014/main" id="{5E0D79D6-DEEC-A26A-BF6B-44F134EB3184}"/>
+              </a:ext>
+            </a:extLst>
+          </p:cNvPr>
           <p:cNvSpPr>
             <a:spLocks noGrp="1" noRot="1" noChangeAspect="1"/>
           </p:cNvSpPr>
@@ -809,7 +950,13 @@
       </p:sp>
       <p:sp>
         <p:nvSpPr>
-          <p:cNvPr id="3" name="Notes Placeholder 2"/>
+          <p:cNvPr id="3" name="Notes Placeholder 2">
+            <a:extLst>
+              <a:ext uri="{FF2B5EF4-FFF2-40B4-BE49-F238E27FC236}">
+                <a16:creationId xmlns:a16="http://schemas.microsoft.com/office/drawing/2014/main" id="{1CD30F4A-9693-14C6-23FD-8CA347C09123}"/>
+              </a:ext>
+            </a:extLst>
+          </p:cNvPr>
           <p:cNvSpPr>
             <a:spLocks noGrp="1"/>
           </p:cNvSpPr>
@@ -823,14 +970,20 @@
           <a:lstStyle/>
           <a:p>
             <a:r>
-              <a:t>Optional: QR-Code oder kurzer Link zum Fragen-Tool.</a:t>
-            </a:r>
-          </a:p>
-        </p:txBody>
-      </p:sp>
-      <p:sp>
-        <p:nvSpPr>
-          <p:cNvPr id="4" name="Slide Number Placeholder 3"/>
+              <a:t>Für Schaltungen, Aufgaben, Diagramme oder Fotos. Viel Fläche lassen und in GoodNotes direkt darüber schreiben.</a:t>
+            </a:r>
+          </a:p>
+        </p:txBody>
+      </p:sp>
+      <p:sp>
+        <p:nvSpPr>
+          <p:cNvPr id="4" name="Slide Number Placeholder 3">
+            <a:extLst>
+              <a:ext uri="{FF2B5EF4-FFF2-40B4-BE49-F238E27FC236}">
+                <a16:creationId xmlns:a16="http://schemas.microsoft.com/office/drawing/2014/main" id="{DF85BA5B-236C-91CC-5A90-60ACF6399DC2}"/>
+              </a:ext>
+            </a:extLst>
+          </p:cNvPr>
           <p:cNvSpPr>
             <a:spLocks noGrp="1"/>
           </p:cNvSpPr>
@@ -841,6 +994,11 @@
         <p:spPr/>
       </p:sp>
     </p:spTree>
+    <p:extLst>
+      <p:ext uri="{BB962C8B-B14F-4D97-AF65-F5344CB8AC3E}">
+        <p14:creationId xmlns:p14="http://schemas.microsoft.com/office/powerpoint/2010/main" val="1494181051"/>
+      </p:ext>
+    </p:extLst>
   </p:cSld>
   <p:clrMapOvr>
     <a:masterClrMapping/>
@@ -853,7 +1011,13 @@
   <p:cSld>
     <p:spTree>
       <p:nvGrpSpPr>
-        <p:cNvPr id="1" name=""/>
+        <p:cNvPr id="1" name="">
+          <a:extLst>
+            <a:ext uri="{FF2B5EF4-FFF2-40B4-BE49-F238E27FC236}">
+              <a16:creationId xmlns:a16="http://schemas.microsoft.com/office/drawing/2014/main" id="{EA1E9A16-3CFC-D828-57B6-F84C64D2039D}"/>
+            </a:ext>
+          </a:extLst>
+        </p:cNvPr>
         <p:cNvGrpSpPr/>
         <p:nvPr/>
       </p:nvGrpSpPr>
@@ -867,7 +1031,13 @@
       </p:grpSpPr>
       <p:sp>
         <p:nvSpPr>
-          <p:cNvPr id="2" name="Slide Image Placeholder 1"/>
+          <p:cNvPr id="2" name="Slide Image Placeholder 1">
+            <a:extLst>
+              <a:ext uri="{FF2B5EF4-FFF2-40B4-BE49-F238E27FC236}">
+                <a16:creationId xmlns:a16="http://schemas.microsoft.com/office/drawing/2014/main" id="{8E90FC7E-3224-F298-6685-7DB08D4DB423}"/>
+              </a:ext>
+            </a:extLst>
+          </p:cNvPr>
           <p:cNvSpPr>
             <a:spLocks noGrp="1" noRot="1" noChangeAspect="1"/>
           </p:cNvSpPr>
@@ -879,7 +1049,13 @@
       </p:sp>
       <p:sp>
         <p:nvSpPr>
-          <p:cNvPr id="3" name="Notes Placeholder 2"/>
+          <p:cNvPr id="3" name="Notes Placeholder 2">
+            <a:extLst>
+              <a:ext uri="{FF2B5EF4-FFF2-40B4-BE49-F238E27FC236}">
+                <a16:creationId xmlns:a16="http://schemas.microsoft.com/office/drawing/2014/main" id="{ADF96908-760A-5E9F-E3C1-61CD869141E2}"/>
+              </a:ext>
+            </a:extLst>
+          </p:cNvPr>
           <p:cNvSpPr>
             <a:spLocks noGrp="1"/>
           </p:cNvSpPr>
@@ -893,14 +1069,20 @@
           <a:lstStyle/>
           <a:p>
             <a:r>
-              <a:t>Interne Stilfolie. Vor dem Präsentieren löschen.</a:t>
-            </a:r>
-          </a:p>
-        </p:txBody>
-      </p:sp>
-      <p:sp>
-        <p:nvSpPr>
-          <p:cNvPr id="4" name="Slide Number Placeholder 3"/>
+              <a:t>Für Schaltungen, Aufgaben, Diagramme oder Fotos. Viel Fläche lassen und in GoodNotes direkt darüber schreiben.</a:t>
+            </a:r>
+          </a:p>
+        </p:txBody>
+      </p:sp>
+      <p:sp>
+        <p:nvSpPr>
+          <p:cNvPr id="4" name="Slide Number Placeholder 3">
+            <a:extLst>
+              <a:ext uri="{FF2B5EF4-FFF2-40B4-BE49-F238E27FC236}">
+                <a16:creationId xmlns:a16="http://schemas.microsoft.com/office/drawing/2014/main" id="{7B83C4CE-F0BC-5592-29B0-8E9047F4EDF4}"/>
+              </a:ext>
+            </a:extLst>
+          </p:cNvPr>
           <p:cNvSpPr>
             <a:spLocks noGrp="1"/>
           </p:cNvSpPr>
@@ -911,6 +1093,11 @@
         <p:spPr/>
       </p:sp>
     </p:spTree>
+    <p:extLst>
+      <p:ext uri="{BB962C8B-B14F-4D97-AF65-F5344CB8AC3E}">
+        <p14:creationId xmlns:p14="http://schemas.microsoft.com/office/powerpoint/2010/main" val="1221542073"/>
+      </p:ext>
+    </p:extLst>
   </p:cSld>
   <p:clrMapOvr>
     <a:masterClrMapping/>
@@ -3364,9 +3551,12 @@
 <p:sldMaster xmlns:a="http://schemas.openxmlformats.org/drawingml/2006/main" xmlns:r="http://schemas.openxmlformats.org/officeDocument/2006/relationships" xmlns:p="http://schemas.openxmlformats.org/presentationml/2006/main">
   <p:cSld>
     <p:bg>
-      <p:bgRef idx="1001">
-        <a:schemeClr val="bg1"/>
-      </p:bgRef>
+      <p:bgPr>
+        <a:solidFill>
+          <a:schemeClr val="bg1"/>
+        </a:solidFill>
+        <a:effectLst/>
+      </p:bgPr>
     </p:bg>
     <p:spTree>
       <p:nvGrpSpPr>
@@ -3871,14 +4061,6 @@
 <file path=ppt/slides/slide1.xml><?xml version="1.0" encoding="utf-8"?>
 <p:sld xmlns:a="http://schemas.openxmlformats.org/drawingml/2006/main" xmlns:r="http://schemas.openxmlformats.org/officeDocument/2006/relationships" xmlns:p="http://schemas.openxmlformats.org/presentationml/2006/main">
   <p:cSld>
-    <p:bg>
-      <p:bgPr>
-        <a:solidFill>
-          <a:srgbClr val="F7F7F5"/>
-        </a:solidFill>
-        <a:effectLst/>
-      </p:bgPr>
-    </p:bg>
     <p:spTree>
       <p:nvGrpSpPr>
         <p:cNvPr id="1" name=""/>
@@ -4340,17 +4522,856 @@
 </p:sld>
 </file>
 
+<file path=ppt/slides/slide10.xml><?xml version="1.0" encoding="utf-8"?>
+<p:sld xmlns:a="http://schemas.openxmlformats.org/drawingml/2006/main" xmlns:r="http://schemas.openxmlformats.org/officeDocument/2006/relationships" xmlns:p="http://schemas.openxmlformats.org/presentationml/2006/main">
+  <p:cSld>
+    <p:spTree>
+      <p:nvGrpSpPr>
+        <p:cNvPr id="1" name=""/>
+        <p:cNvGrpSpPr/>
+        <p:nvPr/>
+      </p:nvGrpSpPr>
+      <p:grpSpPr>
+        <a:xfrm>
+          <a:off x="0" y="0"/>
+          <a:ext cx="0" cy="0"/>
+          <a:chOff x="0" y="0"/>
+          <a:chExt cx="0" cy="0"/>
+        </a:xfrm>
+      </p:grpSpPr>
+      <p:sp>
+        <p:nvSpPr>
+          <p:cNvPr id="2" name="Rounded Rectangle 1"/>
+          <p:cNvSpPr/>
+          <p:nvPr/>
+        </p:nvSpPr>
+        <p:spPr>
+          <a:xfrm>
+            <a:off x="594360" y="475488"/>
+            <a:ext cx="969264" cy="292608"/>
+          </a:xfrm>
+          <a:prstGeom prst="roundRect">
+            <a:avLst/>
+          </a:prstGeom>
+          <a:solidFill>
+            <a:srgbClr val="EEEEEA"/>
+          </a:solidFill>
+          <a:ln w="10160">
+            <a:solidFill>
+              <a:srgbClr val="EEEEEA"/>
+            </a:solidFill>
+          </a:ln>
+        </p:spPr>
+        <p:style>
+          <a:lnRef idx="1">
+            <a:schemeClr val="accent1"/>
+          </a:lnRef>
+          <a:fillRef idx="3">
+            <a:schemeClr val="accent1"/>
+          </a:fillRef>
+          <a:effectRef idx="2">
+            <a:schemeClr val="accent1"/>
+          </a:effectRef>
+          <a:fontRef idx="minor">
+            <a:schemeClr val="lt1"/>
+          </a:fontRef>
+        </p:style>
+        <p:txBody>
+          <a:bodyPr rtlCol="0" anchor="ctr"/>
+          <a:lstStyle/>
+          <a:p>
+            <a:pPr algn="ctr"/>
+            <a:endParaRPr/>
+          </a:p>
+        </p:txBody>
+      </p:sp>
+      <p:sp>
+        <p:nvSpPr>
+          <p:cNvPr id="3" name="TextBox 2"/>
+          <p:cNvSpPr txBox="1"/>
+          <p:nvPr/>
+        </p:nvSpPr>
+        <p:spPr>
+          <a:xfrm>
+            <a:off x="594360" y="484632"/>
+            <a:ext cx="969264" cy="246888"/>
+          </a:xfrm>
+          <a:prstGeom prst="rect">
+            <a:avLst/>
+          </a:prstGeom>
+          <a:noFill/>
+        </p:spPr>
+        <p:txBody>
+          <a:bodyPr wrap="none" lIns="0" tIns="0" rIns="0" bIns="0" anchor="ctr">
+            <a:spAutoFit/>
+          </a:bodyPr>
+          <a:lstStyle/>
+          <a:p>
+            <a:pPr algn="ctr"/>
+            <a:r>
+              <a:rPr sz="850" b="1">
+                <a:solidFill>
+                  <a:srgbClr val="737373"/>
+                </a:solidFill>
+                <a:latin typeface="Aptos"/>
+              </a:rPr>
+              <a:t>AM ENDE</a:t>
+            </a:r>
+          </a:p>
+        </p:txBody>
+      </p:sp>
+      <p:sp>
+        <p:nvSpPr>
+          <p:cNvPr id="4" name="TextBox 3"/>
+          <p:cNvSpPr txBox="1"/>
+          <p:nvPr/>
+        </p:nvSpPr>
+        <p:spPr>
+          <a:xfrm>
+            <a:off x="594360" y="932688"/>
+            <a:ext cx="10515600" cy="594360"/>
+          </a:xfrm>
+          <a:prstGeom prst="rect">
+            <a:avLst/>
+          </a:prstGeom>
+          <a:noFill/>
+        </p:spPr>
+        <p:txBody>
+          <a:bodyPr wrap="none" lIns="0" tIns="0" rIns="0" bIns="0" anchor="t">
+            <a:spAutoFit/>
+          </a:bodyPr>
+          <a:lstStyle/>
+          <a:p>
+            <a:pPr algn="l"/>
+            <a:r>
+              <a:rPr sz="3100" b="1">
+                <a:solidFill>
+                  <a:srgbClr val="171717"/>
+                </a:solidFill>
+                <a:latin typeface="Aptos"/>
+              </a:rPr>
+              <a:t>Takeaways</a:t>
+            </a:r>
+          </a:p>
+        </p:txBody>
+      </p:sp>
+      <p:sp>
+        <p:nvSpPr>
+          <p:cNvPr id="5" name="TextBox 4"/>
+          <p:cNvSpPr txBox="1"/>
+          <p:nvPr/>
+        </p:nvSpPr>
+        <p:spPr>
+          <a:xfrm>
+            <a:off x="612648" y="1609344"/>
+            <a:ext cx="4180503" cy="207749"/>
+          </a:xfrm>
+          <a:prstGeom prst="rect">
+            <a:avLst/>
+          </a:prstGeom>
+          <a:noFill/>
+        </p:spPr>
+        <p:txBody>
+          <a:bodyPr wrap="none" lIns="0" tIns="0" rIns="0" bIns="0" anchor="t">
+            <a:spAutoFit/>
+          </a:bodyPr>
+          <a:lstStyle/>
+          <a:p>
+            <a:pPr algn="l"/>
+            <a:r>
+              <a:rPr sz="1350" b="0" dirty="0">
+                <a:solidFill>
+                  <a:srgbClr val="737373"/>
+                </a:solidFill>
+                <a:latin typeface="Aptos"/>
+              </a:rPr>
+              <a:t>Drei Dinge, die </a:t>
+            </a:r>
+            <a:r>
+              <a:rPr sz="1350" b="0" dirty="0" err="1">
+                <a:solidFill>
+                  <a:srgbClr val="737373"/>
+                </a:solidFill>
+                <a:latin typeface="Aptos"/>
+              </a:rPr>
+              <a:t>heute</a:t>
+            </a:r>
+            <a:r>
+              <a:rPr sz="1350" b="0" dirty="0">
+                <a:solidFill>
+                  <a:srgbClr val="737373"/>
+                </a:solidFill>
+                <a:latin typeface="Aptos"/>
+              </a:rPr>
+              <a:t> </a:t>
+            </a:r>
+            <a:r>
+              <a:rPr sz="1350" b="0" dirty="0" err="1">
+                <a:solidFill>
+                  <a:srgbClr val="737373"/>
+                </a:solidFill>
+                <a:latin typeface="Aptos"/>
+              </a:rPr>
+              <a:t>sitzen</a:t>
+            </a:r>
+            <a:r>
+              <a:rPr sz="1350" b="0" dirty="0">
+                <a:solidFill>
+                  <a:srgbClr val="737373"/>
+                </a:solidFill>
+                <a:latin typeface="Aptos"/>
+              </a:rPr>
+              <a:t> </a:t>
+            </a:r>
+            <a:r>
+              <a:rPr sz="1350" b="0" dirty="0" err="1">
+                <a:solidFill>
+                  <a:srgbClr val="737373"/>
+                </a:solidFill>
+                <a:latin typeface="Aptos"/>
+              </a:rPr>
+              <a:t>sollten</a:t>
+            </a:r>
+            <a:r>
+              <a:rPr sz="1350" b="0" dirty="0">
+                <a:solidFill>
+                  <a:srgbClr val="737373"/>
+                </a:solidFill>
+                <a:latin typeface="Aptos"/>
+              </a:rPr>
+              <a:t>.</a:t>
+            </a:r>
+            <a:r>
+              <a:rPr lang="de-CH" sz="1350" b="0" dirty="0">
+                <a:solidFill>
+                  <a:srgbClr val="737373"/>
+                </a:solidFill>
+                <a:latin typeface="Aptos"/>
+              </a:rPr>
+              <a:t> (Mehr oder weniger)</a:t>
+            </a:r>
+            <a:endParaRPr sz="1350" b="0" dirty="0">
+              <a:solidFill>
+                <a:srgbClr val="737373"/>
+              </a:solidFill>
+              <a:latin typeface="Aptos"/>
+            </a:endParaRPr>
+          </a:p>
+        </p:txBody>
+      </p:sp>
+      <p:cxnSp>
+        <p:nvCxnSpPr>
+          <p:cNvPr id="6" name="Connector 5"/>
+          <p:cNvCxnSpPr/>
+          <p:nvPr/>
+        </p:nvCxnSpPr>
+        <p:spPr>
+          <a:xfrm>
+            <a:off x="594360" y="6446520"/>
+            <a:ext cx="10972800" cy="0"/>
+          </a:xfrm>
+          <a:prstGeom prst="line">
+            <a:avLst/>
+          </a:prstGeom>
+          <a:ln w="12700">
+            <a:solidFill>
+              <a:srgbClr val="E8E8E5"/>
+            </a:solidFill>
+          </a:ln>
+        </p:spPr>
+        <p:style>
+          <a:lnRef idx="2">
+            <a:schemeClr val="accent1"/>
+          </a:lnRef>
+          <a:fillRef idx="0">
+            <a:schemeClr val="accent1"/>
+          </a:fillRef>
+          <a:effectRef idx="1">
+            <a:schemeClr val="accent1"/>
+          </a:effectRef>
+          <a:fontRef idx="minor">
+            <a:schemeClr val="tx1"/>
+          </a:fontRef>
+        </p:style>
+      </p:cxnSp>
+      <p:sp>
+        <p:nvSpPr>
+          <p:cNvPr id="7" name="TextBox 6"/>
+          <p:cNvSpPr txBox="1"/>
+          <p:nvPr/>
+        </p:nvSpPr>
+        <p:spPr>
+          <a:xfrm>
+            <a:off x="594360" y="6492240"/>
+            <a:ext cx="1554480" cy="201168"/>
+          </a:xfrm>
+          <a:prstGeom prst="rect">
+            <a:avLst/>
+          </a:prstGeom>
+          <a:noFill/>
+        </p:spPr>
+        <p:txBody>
+          <a:bodyPr wrap="none" lIns="0" tIns="0" rIns="0" bIns="0" anchor="t">
+            <a:spAutoFit/>
+          </a:bodyPr>
+          <a:lstStyle/>
+          <a:p>
+            <a:pPr algn="l"/>
+            <a:r>
+              <a:rPr sz="850" b="1">
+                <a:solidFill>
+                  <a:srgbClr val="737373"/>
+                </a:solidFill>
+                <a:latin typeface="Aptos"/>
+              </a:rPr>
+              <a:t>NUS1 · ÜBUNG</a:t>
+            </a:r>
+          </a:p>
+        </p:txBody>
+      </p:sp>
+      <p:sp>
+        <p:nvSpPr>
+          <p:cNvPr id="8" name="TextBox 7"/>
+          <p:cNvSpPr txBox="1"/>
+          <p:nvPr/>
+        </p:nvSpPr>
+        <p:spPr>
+          <a:xfrm>
+            <a:off x="10074075" y="6492240"/>
+            <a:ext cx="578685" cy="130805"/>
+          </a:xfrm>
+          <a:prstGeom prst="rect">
+            <a:avLst/>
+          </a:prstGeom>
+          <a:noFill/>
+        </p:spPr>
+        <p:txBody>
+          <a:bodyPr wrap="none" lIns="0" tIns="0" rIns="0" bIns="0" anchor="t">
+            <a:spAutoFit/>
+          </a:bodyPr>
+          <a:lstStyle/>
+          <a:p>
+            <a:pPr algn="r"/>
+            <a:r>
+              <a:rPr sz="850" b="0" dirty="0">
+                <a:solidFill>
+                  <a:srgbClr val="737373"/>
+                </a:solidFill>
+                <a:latin typeface="Aptos"/>
+              </a:rPr>
+              <a:t>Enrico Putzi </a:t>
+            </a:r>
+          </a:p>
+        </p:txBody>
+      </p:sp>
+      <p:sp>
+        <p:nvSpPr>
+          <p:cNvPr id="9" name="TextBox 8"/>
+          <p:cNvSpPr txBox="1"/>
+          <p:nvPr/>
+        </p:nvSpPr>
+        <p:spPr>
+          <a:xfrm>
+            <a:off x="10835640" y="6492240"/>
+            <a:ext cx="731520" cy="201168"/>
+          </a:xfrm>
+          <a:prstGeom prst="rect">
+            <a:avLst/>
+          </a:prstGeom>
+          <a:noFill/>
+        </p:spPr>
+        <p:txBody>
+          <a:bodyPr wrap="none" lIns="0" tIns="0" rIns="0" bIns="0" anchor="t">
+            <a:spAutoFit/>
+          </a:bodyPr>
+          <a:lstStyle/>
+          <a:p>
+            <a:pPr algn="r"/>
+            <a:r>
+              <a:rPr sz="850" b="1">
+                <a:solidFill>
+                  <a:srgbClr val="737373"/>
+                </a:solidFill>
+                <a:latin typeface="Aptos"/>
+              </a:rPr>
+              <a:t>W01</a:t>
+            </a:r>
+          </a:p>
+        </p:txBody>
+      </p:sp>
+      <p:sp>
+        <p:nvSpPr>
+          <p:cNvPr id="10" name="Rounded Rectangle 9"/>
+          <p:cNvSpPr/>
+          <p:nvPr/>
+        </p:nvSpPr>
+        <p:spPr>
+          <a:xfrm>
+            <a:off x="594360" y="2423160"/>
+            <a:ext cx="3401568" cy="2057400"/>
+          </a:xfrm>
+          <a:prstGeom prst="roundRect">
+            <a:avLst/>
+          </a:prstGeom>
+          <a:solidFill>
+            <a:srgbClr val="FFFFFF"/>
+          </a:solidFill>
+          <a:ln w="10160">
+            <a:solidFill>
+              <a:srgbClr val="E8E8E5"/>
+            </a:solidFill>
+          </a:ln>
+        </p:spPr>
+        <p:style>
+          <a:lnRef idx="1">
+            <a:schemeClr val="accent1"/>
+          </a:lnRef>
+          <a:fillRef idx="3">
+            <a:schemeClr val="accent1"/>
+          </a:fillRef>
+          <a:effectRef idx="2">
+            <a:schemeClr val="accent1"/>
+          </a:effectRef>
+          <a:fontRef idx="minor">
+            <a:schemeClr val="lt1"/>
+          </a:fontRef>
+        </p:style>
+        <p:txBody>
+          <a:bodyPr rtlCol="0" anchor="ctr"/>
+          <a:lstStyle/>
+          <a:p>
+            <a:pPr algn="ctr"/>
+            <a:endParaRPr/>
+          </a:p>
+        </p:txBody>
+      </p:sp>
+      <p:sp>
+        <p:nvSpPr>
+          <p:cNvPr id="11" name="TextBox 10"/>
+          <p:cNvSpPr txBox="1"/>
+          <p:nvPr/>
+        </p:nvSpPr>
+        <p:spPr>
+          <a:xfrm>
+            <a:off x="841248" y="2697480"/>
+            <a:ext cx="457200" cy="274320"/>
+          </a:xfrm>
+          <a:prstGeom prst="rect">
+            <a:avLst/>
+          </a:prstGeom>
+          <a:noFill/>
+        </p:spPr>
+        <p:txBody>
+          <a:bodyPr wrap="none" lIns="0" tIns="0" rIns="0" bIns="0" anchor="t">
+            <a:spAutoFit/>
+          </a:bodyPr>
+          <a:lstStyle/>
+          <a:p>
+            <a:pPr algn="l"/>
+            <a:r>
+              <a:rPr sz="1000" b="1">
+                <a:solidFill>
+                  <a:srgbClr val="737373"/>
+                </a:solidFill>
+                <a:latin typeface="Aptos"/>
+              </a:rPr>
+              <a:t>01</a:t>
+            </a:r>
+          </a:p>
+        </p:txBody>
+      </p:sp>
+      <p:sp>
+        <p:nvSpPr>
+          <p:cNvPr id="12" name="TextBox 11"/>
+          <p:cNvSpPr txBox="1"/>
+          <p:nvPr/>
+        </p:nvSpPr>
+        <p:spPr>
+          <a:xfrm>
+            <a:off x="841248" y="3246120"/>
+            <a:ext cx="1672061" cy="276999"/>
+          </a:xfrm>
+          <a:prstGeom prst="rect">
+            <a:avLst/>
+          </a:prstGeom>
+          <a:noFill/>
+        </p:spPr>
+        <p:txBody>
+          <a:bodyPr wrap="none" lIns="0" tIns="0" rIns="0" bIns="0" anchor="t">
+            <a:spAutoFit/>
+          </a:bodyPr>
+          <a:lstStyle/>
+          <a:p>
+            <a:pPr algn="l"/>
+            <a:r>
+              <a:rPr lang="de-CH" b="1" dirty="0">
+                <a:solidFill>
+                  <a:srgbClr val="171717"/>
+                </a:solidFill>
+                <a:latin typeface="Aptos"/>
+              </a:rPr>
+              <a:t>Vektorrechnung</a:t>
+            </a:r>
+            <a:endParaRPr sz="1800" b="1" dirty="0">
+              <a:solidFill>
+                <a:srgbClr val="171717"/>
+              </a:solidFill>
+              <a:latin typeface="Aptos"/>
+            </a:endParaRPr>
+          </a:p>
+        </p:txBody>
+      </p:sp>
+      <p:sp>
+        <p:nvSpPr>
+          <p:cNvPr id="13" name="Rounded Rectangle 12"/>
+          <p:cNvSpPr/>
+          <p:nvPr/>
+        </p:nvSpPr>
+        <p:spPr>
+          <a:xfrm>
+            <a:off x="4297680" y="2423160"/>
+            <a:ext cx="3401568" cy="2057400"/>
+          </a:xfrm>
+          <a:prstGeom prst="roundRect">
+            <a:avLst/>
+          </a:prstGeom>
+          <a:solidFill>
+            <a:srgbClr val="FFFFFF"/>
+          </a:solidFill>
+          <a:ln w="10160">
+            <a:solidFill>
+              <a:srgbClr val="E8E8E5"/>
+            </a:solidFill>
+          </a:ln>
+        </p:spPr>
+        <p:style>
+          <a:lnRef idx="1">
+            <a:schemeClr val="accent1"/>
+          </a:lnRef>
+          <a:fillRef idx="3">
+            <a:schemeClr val="accent1"/>
+          </a:fillRef>
+          <a:effectRef idx="2">
+            <a:schemeClr val="accent1"/>
+          </a:effectRef>
+          <a:fontRef idx="minor">
+            <a:schemeClr val="lt1"/>
+          </a:fontRef>
+        </p:style>
+        <p:txBody>
+          <a:bodyPr rtlCol="0" anchor="ctr"/>
+          <a:lstStyle/>
+          <a:p>
+            <a:pPr algn="ctr"/>
+            <a:endParaRPr dirty="0"/>
+          </a:p>
+        </p:txBody>
+      </p:sp>
+      <p:sp>
+        <p:nvSpPr>
+          <p:cNvPr id="14" name="TextBox 13"/>
+          <p:cNvSpPr txBox="1"/>
+          <p:nvPr/>
+        </p:nvSpPr>
+        <p:spPr>
+          <a:xfrm>
+            <a:off x="4544568" y="2697480"/>
+            <a:ext cx="457200" cy="274320"/>
+          </a:xfrm>
+          <a:prstGeom prst="rect">
+            <a:avLst/>
+          </a:prstGeom>
+          <a:noFill/>
+        </p:spPr>
+        <p:txBody>
+          <a:bodyPr wrap="none" lIns="0" tIns="0" rIns="0" bIns="0" anchor="t">
+            <a:spAutoFit/>
+          </a:bodyPr>
+          <a:lstStyle/>
+          <a:p>
+            <a:pPr algn="l"/>
+            <a:r>
+              <a:rPr sz="1000" b="1">
+                <a:solidFill>
+                  <a:srgbClr val="737373"/>
+                </a:solidFill>
+                <a:latin typeface="Aptos"/>
+              </a:rPr>
+              <a:t>02</a:t>
+            </a:r>
+          </a:p>
+        </p:txBody>
+      </p:sp>
+      <p:sp>
+        <p:nvSpPr>
+          <p:cNvPr id="15" name="TextBox 14"/>
+          <p:cNvSpPr txBox="1"/>
+          <p:nvPr/>
+        </p:nvSpPr>
+        <p:spPr>
+          <a:xfrm>
+            <a:off x="4544568" y="3246120"/>
+            <a:ext cx="2990178" cy="276999"/>
+          </a:xfrm>
+          <a:prstGeom prst="rect">
+            <a:avLst/>
+          </a:prstGeom>
+          <a:noFill/>
+        </p:spPr>
+        <p:txBody>
+          <a:bodyPr wrap="none" lIns="0" tIns="0" rIns="0" bIns="0" anchor="t">
+            <a:spAutoFit/>
+          </a:bodyPr>
+          <a:lstStyle/>
+          <a:p>
+            <a:pPr algn="l"/>
+            <a:r>
+              <a:rPr lang="de-CH" b="1" dirty="0">
+                <a:solidFill>
+                  <a:srgbClr val="171717"/>
+                </a:solidFill>
+                <a:latin typeface="Aptos"/>
+              </a:rPr>
+              <a:t>Koordinatensysteme kennen</a:t>
+            </a:r>
+            <a:endParaRPr sz="1800" b="1" dirty="0">
+              <a:solidFill>
+                <a:srgbClr val="171717"/>
+              </a:solidFill>
+              <a:latin typeface="Aptos"/>
+            </a:endParaRPr>
+          </a:p>
+        </p:txBody>
+      </p:sp>
+      <p:sp>
+        <p:nvSpPr>
+          <p:cNvPr id="16" name="Rounded Rectangle 15"/>
+          <p:cNvSpPr/>
+          <p:nvPr/>
+        </p:nvSpPr>
+        <p:spPr>
+          <a:xfrm>
+            <a:off x="8001000" y="2423160"/>
+            <a:ext cx="3401568" cy="2057400"/>
+          </a:xfrm>
+          <a:prstGeom prst="roundRect">
+            <a:avLst/>
+          </a:prstGeom>
+          <a:solidFill>
+            <a:srgbClr val="FFFFFF"/>
+          </a:solidFill>
+          <a:ln w="10160">
+            <a:solidFill>
+              <a:srgbClr val="E8E8E5"/>
+            </a:solidFill>
+          </a:ln>
+        </p:spPr>
+        <p:style>
+          <a:lnRef idx="1">
+            <a:schemeClr val="accent1"/>
+          </a:lnRef>
+          <a:fillRef idx="3">
+            <a:schemeClr val="accent1"/>
+          </a:fillRef>
+          <a:effectRef idx="2">
+            <a:schemeClr val="accent1"/>
+          </a:effectRef>
+          <a:fontRef idx="minor">
+            <a:schemeClr val="lt1"/>
+          </a:fontRef>
+        </p:style>
+        <p:txBody>
+          <a:bodyPr rtlCol="0" anchor="ctr"/>
+          <a:lstStyle/>
+          <a:p>
+            <a:pPr algn="ctr"/>
+            <a:endParaRPr/>
+          </a:p>
+        </p:txBody>
+      </p:sp>
+      <p:sp>
+        <p:nvSpPr>
+          <p:cNvPr id="17" name="TextBox 16"/>
+          <p:cNvSpPr txBox="1"/>
+          <p:nvPr/>
+        </p:nvSpPr>
+        <p:spPr>
+          <a:xfrm>
+            <a:off x="8247888" y="2697480"/>
+            <a:ext cx="457200" cy="274320"/>
+          </a:xfrm>
+          <a:prstGeom prst="rect">
+            <a:avLst/>
+          </a:prstGeom>
+          <a:noFill/>
+        </p:spPr>
+        <p:txBody>
+          <a:bodyPr wrap="none" lIns="0" tIns="0" rIns="0" bIns="0" anchor="t">
+            <a:spAutoFit/>
+          </a:bodyPr>
+          <a:lstStyle/>
+          <a:p>
+            <a:pPr algn="l"/>
+            <a:r>
+              <a:rPr sz="1000" b="1">
+                <a:solidFill>
+                  <a:srgbClr val="737373"/>
+                </a:solidFill>
+                <a:latin typeface="Aptos"/>
+              </a:rPr>
+              <a:t>03</a:t>
+            </a:r>
+          </a:p>
+        </p:txBody>
+      </p:sp>
+      <p:sp>
+        <p:nvSpPr>
+          <p:cNvPr id="18" name="TextBox 17"/>
+          <p:cNvSpPr txBox="1"/>
+          <p:nvPr/>
+        </p:nvSpPr>
+        <p:spPr>
+          <a:xfrm>
+            <a:off x="8247888" y="3246120"/>
+            <a:ext cx="2929263" cy="553998"/>
+          </a:xfrm>
+          <a:prstGeom prst="rect">
+            <a:avLst/>
+          </a:prstGeom>
+          <a:noFill/>
+        </p:spPr>
+        <p:txBody>
+          <a:bodyPr wrap="none" lIns="0" tIns="0" rIns="0" bIns="0" anchor="t">
+            <a:spAutoFit/>
+          </a:bodyPr>
+          <a:lstStyle/>
+          <a:p>
+            <a:pPr algn="l"/>
+            <a:r>
+              <a:rPr lang="de-CH" b="1" dirty="0" err="1">
+                <a:solidFill>
+                  <a:srgbClr val="171717"/>
+                </a:solidFill>
+                <a:latin typeface="Aptos"/>
+              </a:rPr>
+              <a:t>Evlt</a:t>
+            </a:r>
+            <a:r>
+              <a:rPr lang="de-CH" b="1" dirty="0">
+                <a:solidFill>
+                  <a:srgbClr val="171717"/>
+                </a:solidFill>
+                <a:latin typeface="Aptos"/>
+              </a:rPr>
+              <a:t>. Verstehen was Flächen</a:t>
+            </a:r>
+            <a:br>
+              <a:rPr lang="de-CH" b="1" dirty="0">
+                <a:solidFill>
+                  <a:srgbClr val="171717"/>
+                </a:solidFill>
+                <a:latin typeface="Aptos"/>
+              </a:rPr>
+            </a:br>
+            <a:r>
+              <a:rPr lang="de-CH" b="1" dirty="0">
+                <a:solidFill>
+                  <a:srgbClr val="171717"/>
+                </a:solidFill>
+                <a:latin typeface="Aptos"/>
+              </a:rPr>
+              <a:t>und Kurvenintegrale sind</a:t>
+            </a:r>
+            <a:endParaRPr sz="1800" b="1" dirty="0">
+              <a:solidFill>
+                <a:srgbClr val="171717"/>
+              </a:solidFill>
+              <a:latin typeface="Aptos"/>
+            </a:endParaRPr>
+          </a:p>
+        </p:txBody>
+      </p:sp>
+      <p:sp>
+        <p:nvSpPr>
+          <p:cNvPr id="19" name="TextBox 18"/>
+          <p:cNvSpPr txBox="1"/>
+          <p:nvPr/>
+        </p:nvSpPr>
+        <p:spPr>
+          <a:xfrm>
+            <a:off x="621792" y="5074920"/>
+            <a:ext cx="1828800" cy="457200"/>
+          </a:xfrm>
+          <a:prstGeom prst="rect">
+            <a:avLst/>
+          </a:prstGeom>
+          <a:noFill/>
+        </p:spPr>
+        <p:txBody>
+          <a:bodyPr wrap="none" lIns="0" tIns="0" rIns="0" bIns="0" anchor="t">
+            <a:spAutoFit/>
+          </a:bodyPr>
+          <a:lstStyle/>
+          <a:p>
+            <a:pPr algn="l"/>
+            <a:r>
+              <a:rPr sz="2300" b="1">
+                <a:solidFill>
+                  <a:srgbClr val="171717"/>
+                </a:solidFill>
+                <a:latin typeface="Aptos"/>
+              </a:rPr>
+              <a:t>Fragen?</a:t>
+            </a:r>
+          </a:p>
+        </p:txBody>
+      </p:sp>
+      <p:sp>
+        <p:nvSpPr>
+          <p:cNvPr id="20" name="TextBox 19"/>
+          <p:cNvSpPr txBox="1"/>
+          <p:nvPr/>
+        </p:nvSpPr>
+        <p:spPr>
+          <a:xfrm>
+            <a:off x="640080" y="5532120"/>
+            <a:ext cx="4572000" cy="274320"/>
+          </a:xfrm>
+          <a:prstGeom prst="rect">
+            <a:avLst/>
+          </a:prstGeom>
+          <a:noFill/>
+        </p:spPr>
+        <p:txBody>
+          <a:bodyPr wrap="none" lIns="0" tIns="0" rIns="0" bIns="0" anchor="t">
+            <a:spAutoFit/>
+          </a:bodyPr>
+          <a:lstStyle/>
+          <a:p>
+            <a:pPr algn="l"/>
+            <a:r>
+              <a:rPr sz="1050" b="0">
+                <a:solidFill>
+                  <a:srgbClr val="737373"/>
+                </a:solidFill>
+                <a:latin typeface="Aptos"/>
+              </a:rPr>
+              <a:t>[QR / Link zum Fragen-Tool]</a:t>
+            </a:r>
+          </a:p>
+        </p:txBody>
+      </p:sp>
+    </p:spTree>
+  </p:cSld>
+  <p:clrMapOvr>
+    <a:masterClrMapping/>
+  </p:clrMapOvr>
+</p:sld>
+</file>
+
 <file path=ppt/slides/slide2.xml><?xml version="1.0" encoding="utf-8"?>
 <p:sld xmlns:a="http://schemas.openxmlformats.org/drawingml/2006/main" xmlns:r="http://schemas.openxmlformats.org/officeDocument/2006/relationships" xmlns:p="http://schemas.openxmlformats.org/presentationml/2006/main">
   <p:cSld>
-    <p:bg>
-      <p:bgPr>
-        <a:solidFill>
-          <a:srgbClr val="F7F7F5"/>
-        </a:solidFill>
-        <a:effectLst/>
-      </p:bgPr>
-    </p:bg>
     <p:spTree>
       <p:nvGrpSpPr>
         <p:cNvPr id="1" name=""/>
@@ -5127,7 +6148,7 @@
         </p:nvSpPr>
         <p:spPr>
           <a:xfrm>
-            <a:off x="10105662" y="6492240"/>
+            <a:off x="10077954" y="6492240"/>
             <a:ext cx="556242" cy="130805"/>
           </a:xfrm>
           <a:prstGeom prst="rect">
@@ -5271,14 +6292,6 @@
 <file path=ppt/slides/slide4.xml><?xml version="1.0" encoding="utf-8"?>
 <p:sld xmlns:a="http://schemas.openxmlformats.org/drawingml/2006/main" xmlns:r="http://schemas.openxmlformats.org/officeDocument/2006/relationships" xmlns:p="http://schemas.openxmlformats.org/presentationml/2006/main">
   <p:cSld>
-    <p:bg>
-      <p:bgPr>
-        <a:solidFill>
-          <a:srgbClr val="F7F7F5"/>
-        </a:solidFill>
-        <a:effectLst/>
-      </p:bgPr>
-    </p:bg>
     <p:spTree>
       <p:nvGrpSpPr>
         <p:cNvPr id="1" name=""/>
@@ -5602,6 +6615,339 @@
           </a:p>
         </p:txBody>
       </p:sp>
+      <p:pic>
+        <p:nvPicPr>
+          <p:cNvPr id="12" name="Grafik 11">
+            <a:extLst>
+              <a:ext uri="{FF2B5EF4-FFF2-40B4-BE49-F238E27FC236}">
+                <a16:creationId xmlns:a16="http://schemas.microsoft.com/office/drawing/2014/main" id="{44731B15-E7EA-CA3F-0388-82E22372F9B8}"/>
+              </a:ext>
+            </a:extLst>
+          </p:cNvPr>
+          <p:cNvPicPr>
+            <a:picLocks noChangeAspect="1"/>
+          </p:cNvPicPr>
+          <p:nvPr/>
+        </p:nvPicPr>
+        <p:blipFill>
+          <a:blip r:embed="rId3"/>
+          <a:stretch>
+            <a:fillRect/>
+          </a:stretch>
+        </p:blipFill>
+        <p:spPr>
+          <a:xfrm>
+            <a:off x="70639" y="2711098"/>
+            <a:ext cx="4582164" cy="2686425"/>
+          </a:xfrm>
+          <a:prstGeom prst="rect">
+            <a:avLst/>
+          </a:prstGeom>
+        </p:spPr>
+      </p:pic>
+      <p:pic>
+        <p:nvPicPr>
+          <p:cNvPr id="14" name="Grafik 13">
+            <a:extLst>
+              <a:ext uri="{FF2B5EF4-FFF2-40B4-BE49-F238E27FC236}">
+                <a16:creationId xmlns:a16="http://schemas.microsoft.com/office/drawing/2014/main" id="{8D967584-1589-9E41-CD53-81358C60AB70}"/>
+              </a:ext>
+            </a:extLst>
+          </p:cNvPr>
+          <p:cNvPicPr>
+            <a:picLocks noChangeAspect="1"/>
+          </p:cNvPicPr>
+          <p:nvPr/>
+        </p:nvPicPr>
+        <p:blipFill>
+          <a:blip r:embed="rId4"/>
+          <a:stretch>
+            <a:fillRect/>
+          </a:stretch>
+        </p:blipFill>
+        <p:spPr>
+          <a:xfrm>
+            <a:off x="4652803" y="1171215"/>
+            <a:ext cx="946279" cy="1080896"/>
+          </a:xfrm>
+          <a:prstGeom prst="rect">
+            <a:avLst/>
+          </a:prstGeom>
+        </p:spPr>
+      </p:pic>
+      <p:pic>
+        <p:nvPicPr>
+          <p:cNvPr id="15" name="Grafik 14" descr="Stream WAIT WAIT WAIT, WHAT THE HELL by Gr1zzlylifts | Listen online for  free on SoundCloud">
+            <a:extLst>
+              <a:ext uri="{FF2B5EF4-FFF2-40B4-BE49-F238E27FC236}">
+                <a16:creationId xmlns:a16="http://schemas.microsoft.com/office/drawing/2014/main" id="{D7483343-DA1A-15E2-1AF2-4C3134E1801C}"/>
+              </a:ext>
+            </a:extLst>
+          </p:cNvPr>
+          <p:cNvPicPr>
+            <a:picLocks noChangeAspect="1"/>
+          </p:cNvPicPr>
+          <p:nvPr/>
+        </p:nvPicPr>
+        <p:blipFill>
+          <a:blip r:embed="rId5"/>
+          <a:stretch>
+            <a:fillRect/>
+          </a:stretch>
+        </p:blipFill>
+        <p:spPr>
+          <a:xfrm>
+            <a:off x="5839114" y="1113082"/>
+            <a:ext cx="1139029" cy="1139029"/>
+          </a:xfrm>
+          <a:prstGeom prst="rect">
+            <a:avLst/>
+          </a:prstGeom>
+        </p:spPr>
+      </p:pic>
+      <p:sp>
+        <p:nvSpPr>
+          <p:cNvPr id="16" name="Multiplikationszeichen 15">
+            <a:extLst>
+              <a:ext uri="{FF2B5EF4-FFF2-40B4-BE49-F238E27FC236}">
+                <a16:creationId xmlns:a16="http://schemas.microsoft.com/office/drawing/2014/main" id="{37A8035C-498A-DA20-2715-8AEECB3D3E1F}"/>
+              </a:ext>
+            </a:extLst>
+          </p:cNvPr>
+          <p:cNvSpPr/>
+          <p:nvPr/>
+        </p:nvSpPr>
+        <p:spPr>
+          <a:xfrm>
+            <a:off x="4652803" y="1293090"/>
+            <a:ext cx="1027561" cy="886691"/>
+          </a:xfrm>
+          <a:prstGeom prst="mathMultiply">
+            <a:avLst/>
+          </a:prstGeom>
+          <a:gradFill>
+            <a:gsLst>
+              <a:gs pos="0">
+                <a:schemeClr val="accent2">
+                  <a:tint val="100000"/>
+                  <a:shade val="100000"/>
+                  <a:satMod val="130000"/>
+                  <a:alpha val="30000"/>
+                </a:schemeClr>
+              </a:gs>
+              <a:gs pos="100000">
+                <a:schemeClr val="accent2">
+                  <a:tint val="50000"/>
+                  <a:shade val="100000"/>
+                  <a:satMod val="350000"/>
+                </a:schemeClr>
+              </a:gs>
+            </a:gsLst>
+          </a:gradFill>
+        </p:spPr>
+        <p:style>
+          <a:lnRef idx="1">
+            <a:schemeClr val="accent2"/>
+          </a:lnRef>
+          <a:fillRef idx="3">
+            <a:schemeClr val="accent2"/>
+          </a:fillRef>
+          <a:effectRef idx="2">
+            <a:schemeClr val="accent2"/>
+          </a:effectRef>
+          <a:fontRef idx="minor">
+            <a:schemeClr val="lt1"/>
+          </a:fontRef>
+        </p:style>
+        <p:txBody>
+          <a:bodyPr rtlCol="0" anchor="ctr"/>
+          <a:lstStyle/>
+          <a:p>
+            <a:pPr algn="ctr"/>
+            <a:endParaRPr lang="de-CH"/>
+          </a:p>
+        </p:txBody>
+      </p:sp>
+      <p:pic>
+        <p:nvPicPr>
+          <p:cNvPr id="22" name="Grafik 21">
+            <a:extLst>
+              <a:ext uri="{FF2B5EF4-FFF2-40B4-BE49-F238E27FC236}">
+                <a16:creationId xmlns:a16="http://schemas.microsoft.com/office/drawing/2014/main" id="{28022F18-74AF-723B-1A23-71F3210F468B}"/>
+              </a:ext>
+            </a:extLst>
+          </p:cNvPr>
+          <p:cNvPicPr>
+            <a:picLocks noChangeAspect="1"/>
+          </p:cNvPicPr>
+          <p:nvPr/>
+        </p:nvPicPr>
+        <p:blipFill>
+          <a:blip r:embed="rId6"/>
+          <a:stretch>
+            <a:fillRect/>
+          </a:stretch>
+        </p:blipFill>
+        <p:spPr>
+          <a:xfrm>
+            <a:off x="5599082" y="3197405"/>
+            <a:ext cx="1925145" cy="1961129"/>
+          </a:xfrm>
+          <a:prstGeom prst="rect">
+            <a:avLst/>
+          </a:prstGeom>
+        </p:spPr>
+      </p:pic>
+      <p:pic>
+        <p:nvPicPr>
+          <p:cNvPr id="24" name="Grafik 23">
+            <a:extLst>
+              <a:ext uri="{FF2B5EF4-FFF2-40B4-BE49-F238E27FC236}">
+                <a16:creationId xmlns:a16="http://schemas.microsoft.com/office/drawing/2014/main" id="{84BE94D0-C324-4ECB-A1D8-FBA5302CC4B9}"/>
+              </a:ext>
+            </a:extLst>
+          </p:cNvPr>
+          <p:cNvPicPr>
+            <a:picLocks noChangeAspect="1"/>
+          </p:cNvPicPr>
+          <p:nvPr/>
+        </p:nvPicPr>
+        <p:blipFill>
+          <a:blip r:embed="rId7"/>
+          <a:stretch>
+            <a:fillRect/>
+          </a:stretch>
+        </p:blipFill>
+        <p:spPr>
+          <a:xfrm>
+            <a:off x="5311501" y="5446117"/>
+            <a:ext cx="2648320" cy="847843"/>
+          </a:xfrm>
+          <a:prstGeom prst="rect">
+            <a:avLst/>
+          </a:prstGeom>
+        </p:spPr>
+      </p:pic>
+      <p:pic>
+        <p:nvPicPr>
+          <p:cNvPr id="26" name="Grafik 25">
+            <a:extLst>
+              <a:ext uri="{FF2B5EF4-FFF2-40B4-BE49-F238E27FC236}">
+                <a16:creationId xmlns:a16="http://schemas.microsoft.com/office/drawing/2014/main" id="{08F7E060-DA22-8228-795D-8435E7EF9B87}"/>
+              </a:ext>
+            </a:extLst>
+          </p:cNvPr>
+          <p:cNvPicPr>
+            <a:picLocks noChangeAspect="1"/>
+          </p:cNvPicPr>
+          <p:nvPr/>
+        </p:nvPicPr>
+        <p:blipFill>
+          <a:blip r:embed="rId8"/>
+          <a:stretch>
+            <a:fillRect/>
+          </a:stretch>
+        </p:blipFill>
+        <p:spPr>
+          <a:xfrm>
+            <a:off x="5059144" y="2677517"/>
+            <a:ext cx="2695951" cy="381053"/>
+          </a:xfrm>
+          <a:prstGeom prst="rect">
+            <a:avLst/>
+          </a:prstGeom>
+        </p:spPr>
+      </p:pic>
+      <p:pic>
+        <p:nvPicPr>
+          <p:cNvPr id="28" name="Grafik 27">
+            <a:extLst>
+              <a:ext uri="{FF2B5EF4-FFF2-40B4-BE49-F238E27FC236}">
+                <a16:creationId xmlns:a16="http://schemas.microsoft.com/office/drawing/2014/main" id="{C5DB9604-234F-B5B7-1C73-F0283EE123D7}"/>
+              </a:ext>
+            </a:extLst>
+          </p:cNvPr>
+          <p:cNvPicPr>
+            <a:picLocks noChangeAspect="1"/>
+          </p:cNvPicPr>
+          <p:nvPr/>
+        </p:nvPicPr>
+        <p:blipFill>
+          <a:blip r:embed="rId9"/>
+          <a:stretch>
+            <a:fillRect/>
+          </a:stretch>
+        </p:blipFill>
+        <p:spPr>
+          <a:xfrm>
+            <a:off x="8539965" y="3073949"/>
+            <a:ext cx="2567347" cy="2256730"/>
+          </a:xfrm>
+          <a:prstGeom prst="rect">
+            <a:avLst/>
+          </a:prstGeom>
+        </p:spPr>
+      </p:pic>
+      <p:pic>
+        <p:nvPicPr>
+          <p:cNvPr id="30" name="Grafik 29">
+            <a:extLst>
+              <a:ext uri="{FF2B5EF4-FFF2-40B4-BE49-F238E27FC236}">
+                <a16:creationId xmlns:a16="http://schemas.microsoft.com/office/drawing/2014/main" id="{105FD913-A526-4B28-F89D-7CC4B7D50904}"/>
+              </a:ext>
+            </a:extLst>
+          </p:cNvPr>
+          <p:cNvPicPr>
+            <a:picLocks noChangeAspect="1"/>
+          </p:cNvPicPr>
+          <p:nvPr/>
+        </p:nvPicPr>
+        <p:blipFill>
+          <a:blip r:embed="rId10"/>
+          <a:stretch>
+            <a:fillRect/>
+          </a:stretch>
+        </p:blipFill>
+        <p:spPr>
+          <a:xfrm>
+            <a:off x="8618519" y="5506262"/>
+            <a:ext cx="2567347" cy="727555"/>
+          </a:xfrm>
+          <a:prstGeom prst="rect">
+            <a:avLst/>
+          </a:prstGeom>
+        </p:spPr>
+      </p:pic>
+      <p:pic>
+        <p:nvPicPr>
+          <p:cNvPr id="32" name="Grafik 31">
+            <a:extLst>
+              <a:ext uri="{FF2B5EF4-FFF2-40B4-BE49-F238E27FC236}">
+                <a16:creationId xmlns:a16="http://schemas.microsoft.com/office/drawing/2014/main" id="{0ECCD622-6C46-1927-4012-2A74217272BB}"/>
+              </a:ext>
+            </a:extLst>
+          </p:cNvPr>
+          <p:cNvPicPr>
+            <a:picLocks noChangeAspect="1"/>
+          </p:cNvPicPr>
+          <p:nvPr/>
+        </p:nvPicPr>
+        <p:blipFill>
+          <a:blip r:embed="rId11"/>
+          <a:stretch>
+            <a:fillRect/>
+          </a:stretch>
+        </p:blipFill>
+        <p:spPr>
+          <a:xfrm>
+            <a:off x="8539965" y="2722129"/>
+            <a:ext cx="2419688" cy="352474"/>
+          </a:xfrm>
+          <a:prstGeom prst="rect">
+            <a:avLst/>
+          </a:prstGeom>
+        </p:spPr>
+      </p:pic>
     </p:spTree>
   </p:cSld>
   <p:clrMapOvr>
@@ -5613,17 +6959,15 @@
 <file path=ppt/slides/slide5.xml><?xml version="1.0" encoding="utf-8"?>
 <p:sld xmlns:a="http://schemas.openxmlformats.org/drawingml/2006/main" xmlns:r="http://schemas.openxmlformats.org/officeDocument/2006/relationships" xmlns:p="http://schemas.openxmlformats.org/presentationml/2006/main">
   <p:cSld>
-    <p:bg>
-      <p:bgPr>
-        <a:solidFill>
-          <a:srgbClr val="F7F7F5"/>
-        </a:solidFill>
-        <a:effectLst/>
-      </p:bgPr>
-    </p:bg>
     <p:spTree>
       <p:nvGrpSpPr>
-        <p:cNvPr id="1" name=""/>
+        <p:cNvPr id="1" name="">
+          <a:extLst>
+            <a:ext uri="{FF2B5EF4-FFF2-40B4-BE49-F238E27FC236}">
+              <a16:creationId xmlns:a16="http://schemas.microsoft.com/office/drawing/2014/main" id="{61B9C0BF-5721-B255-5FF0-4099BD9C597C}"/>
+            </a:ext>
+          </a:extLst>
+        </p:cNvPr>
         <p:cNvGrpSpPr/>
         <p:nvPr/>
       </p:nvGrpSpPr>
@@ -5637,7 +6981,13 @@
       </p:grpSpPr>
       <p:sp>
         <p:nvSpPr>
-          <p:cNvPr id="2" name="Rounded Rectangle 1"/>
+          <p:cNvPr id="2" name="Rounded Rectangle 1">
+            <a:extLst>
+              <a:ext uri="{FF2B5EF4-FFF2-40B4-BE49-F238E27FC236}">
+                <a16:creationId xmlns:a16="http://schemas.microsoft.com/office/drawing/2014/main" id="{6E9B7467-55C4-B494-13F4-70261E613AF4}"/>
+              </a:ext>
+            </a:extLst>
+          </p:cNvPr>
           <p:cNvSpPr/>
           <p:nvPr/>
         </p:nvSpPr>
@@ -5683,7 +7033,13 @@
       </p:sp>
       <p:sp>
         <p:nvSpPr>
-          <p:cNvPr id="3" name="TextBox 2"/>
+          <p:cNvPr id="3" name="TextBox 2">
+            <a:extLst>
+              <a:ext uri="{FF2B5EF4-FFF2-40B4-BE49-F238E27FC236}">
+                <a16:creationId xmlns:a16="http://schemas.microsoft.com/office/drawing/2014/main" id="{F01CDE0B-B9CA-B039-7A9B-936C5F4A4320}"/>
+              </a:ext>
+            </a:extLst>
+          </p:cNvPr>
           <p:cNvSpPr txBox="1"/>
           <p:nvPr/>
         </p:nvSpPr>
@@ -5718,14 +7074,20 @@
       </p:sp>
       <p:sp>
         <p:nvSpPr>
-          <p:cNvPr id="4" name="TextBox 3"/>
+          <p:cNvPr id="4" name="TextBox 3">
+            <a:extLst>
+              <a:ext uri="{FF2B5EF4-FFF2-40B4-BE49-F238E27FC236}">
+                <a16:creationId xmlns:a16="http://schemas.microsoft.com/office/drawing/2014/main" id="{3CE1B591-556E-212C-7EB5-F143E6489AE2}"/>
+              </a:ext>
+            </a:extLst>
+          </p:cNvPr>
           <p:cNvSpPr txBox="1"/>
           <p:nvPr/>
         </p:nvSpPr>
         <p:spPr>
           <a:xfrm>
             <a:off x="594360" y="932688"/>
-            <a:ext cx="10515600" cy="594360"/>
+            <a:ext cx="1711431" cy="477054"/>
           </a:xfrm>
           <a:prstGeom prst="rect">
             <a:avLst/>
@@ -5740,91 +7102,32 @@
           <a:p>
             <a:pPr algn="l"/>
             <a:r>
-              <a:rPr sz="3100" b="1">
+              <a:rPr lang="de-CH" sz="3100" b="1" dirty="0">
                 <a:solidFill>
                   <a:srgbClr val="171717"/>
                 </a:solidFill>
                 <a:latin typeface="Aptos"/>
               </a:rPr>
-              <a:t>[Titel]</a:t>
-            </a:r>
-          </a:p>
-        </p:txBody>
-      </p:sp>
-      <p:sp>
-        <p:nvSpPr>
-          <p:cNvPr id="5" name="TextBox 4"/>
-          <p:cNvSpPr txBox="1"/>
-          <p:nvPr/>
-        </p:nvSpPr>
-        <p:spPr>
-          <a:xfrm>
-            <a:off x="612648" y="1609344"/>
-            <a:ext cx="9692640" cy="384048"/>
-          </a:xfrm>
-          <a:prstGeom prst="rect">
-            <a:avLst/>
-          </a:prstGeom>
-          <a:noFill/>
-        </p:spPr>
-        <p:txBody>
-          <a:bodyPr wrap="none" lIns="0" tIns="0" rIns="0" bIns="0" anchor="t">
-            <a:spAutoFit/>
-          </a:bodyPr>
-          <a:lstStyle/>
-          <a:p>
-            <a:pPr algn="l"/>
-            <a:r>
-              <a:rPr sz="1350" b="0" dirty="0">
-                <a:solidFill>
-                  <a:srgbClr val="737373"/>
-                </a:solidFill>
-                <a:latin typeface="Aptos"/>
-              </a:rPr>
-              <a:t>[optional: </a:t>
-            </a:r>
-            <a:r>
-              <a:rPr sz="1350" b="0" dirty="0" err="1">
-                <a:solidFill>
-                  <a:srgbClr val="737373"/>
-                </a:solidFill>
-                <a:latin typeface="Aptos"/>
-              </a:rPr>
-              <a:t>kurzer</a:t>
-            </a:r>
-            <a:r>
-              <a:rPr sz="1350" b="0" dirty="0">
-                <a:solidFill>
-                  <a:srgbClr val="737373"/>
-                </a:solidFill>
-                <a:latin typeface="Aptos"/>
-              </a:rPr>
-              <a:t> </a:t>
-            </a:r>
-            <a:r>
-              <a:rPr sz="1350" b="0" dirty="0" err="1">
-                <a:solidFill>
-                  <a:srgbClr val="737373"/>
-                </a:solidFill>
-                <a:latin typeface="Aptos"/>
-              </a:rPr>
-              <a:t>Kontext</a:t>
-            </a:r>
-            <a:r>
-              <a:rPr sz="1350" b="0" dirty="0">
-                <a:solidFill>
-                  <a:srgbClr val="737373"/>
-                </a:solidFill>
-                <a:latin typeface="Aptos"/>
-              </a:rPr>
-              <a:t>]</a:t>
-            </a:r>
+              <a:t>Aufgaben</a:t>
+            </a:r>
+            <a:endParaRPr sz="3100" b="1" dirty="0">
+              <a:solidFill>
+                <a:srgbClr val="171717"/>
+              </a:solidFill>
+              <a:latin typeface="Aptos"/>
+            </a:endParaRPr>
           </a:p>
         </p:txBody>
       </p:sp>
       <p:cxnSp>
         <p:nvCxnSpPr>
-          <p:cNvPr id="6" name="Connector 5"/>
+          <p:cNvPr id="6" name="Connector 5">
+            <a:extLst>
+              <a:ext uri="{FF2B5EF4-FFF2-40B4-BE49-F238E27FC236}">
+                <a16:creationId xmlns:a16="http://schemas.microsoft.com/office/drawing/2014/main" id="{A203AFF3-69D9-5947-E355-3BF4D796BBF9}"/>
+              </a:ext>
+            </a:extLst>
+          </p:cNvPr>
           <p:cNvCxnSpPr/>
           <p:nvPr/>
         </p:nvCxnSpPr>
@@ -5859,7 +7162,13 @@
       </p:cxnSp>
       <p:sp>
         <p:nvSpPr>
-          <p:cNvPr id="7" name="TextBox 6"/>
+          <p:cNvPr id="7" name="TextBox 6">
+            <a:extLst>
+              <a:ext uri="{FF2B5EF4-FFF2-40B4-BE49-F238E27FC236}">
+                <a16:creationId xmlns:a16="http://schemas.microsoft.com/office/drawing/2014/main" id="{2F2C4F7C-8CB8-CBFE-A4A1-D4BBC9B0D879}"/>
+              </a:ext>
+            </a:extLst>
+          </p:cNvPr>
           <p:cNvSpPr txBox="1"/>
           <p:nvPr/>
         </p:nvSpPr>
@@ -5894,7 +7203,13 @@
       </p:sp>
       <p:sp>
         <p:nvSpPr>
-          <p:cNvPr id="8" name="TextBox 7"/>
+          <p:cNvPr id="8" name="TextBox 7">
+            <a:extLst>
+              <a:ext uri="{FF2B5EF4-FFF2-40B4-BE49-F238E27FC236}">
+                <a16:creationId xmlns:a16="http://schemas.microsoft.com/office/drawing/2014/main" id="{0B8F7B99-CCEF-72B7-F761-42B7A83CFAB0}"/>
+              </a:ext>
+            </a:extLst>
+          </p:cNvPr>
           <p:cNvSpPr txBox="1"/>
           <p:nvPr/>
         </p:nvSpPr>
@@ -5929,7 +7244,13 @@
       </p:sp>
       <p:sp>
         <p:nvSpPr>
-          <p:cNvPr id="9" name="TextBox 8"/>
+          <p:cNvPr id="9" name="TextBox 8">
+            <a:extLst>
+              <a:ext uri="{FF2B5EF4-FFF2-40B4-BE49-F238E27FC236}">
+                <a16:creationId xmlns:a16="http://schemas.microsoft.com/office/drawing/2014/main" id="{9E4A4AC9-7B79-E2EE-811F-0C939AA117B0}"/>
+              </a:ext>
+            </a:extLst>
+          </p:cNvPr>
           <p:cNvSpPr txBox="1"/>
           <p:nvPr/>
         </p:nvSpPr>
@@ -5964,7 +7285,13 @@
       </p:sp>
       <p:sp>
         <p:nvSpPr>
-          <p:cNvPr id="11" name="TextBox 10"/>
+          <p:cNvPr id="11" name="TextBox 10">
+            <a:extLst>
+              <a:ext uri="{FF2B5EF4-FFF2-40B4-BE49-F238E27FC236}">
+                <a16:creationId xmlns:a16="http://schemas.microsoft.com/office/drawing/2014/main" id="{60FA28EB-4818-1331-D467-2C360A34CCEA}"/>
+              </a:ext>
+            </a:extLst>
+          </p:cNvPr>
           <p:cNvSpPr txBox="1"/>
           <p:nvPr/>
         </p:nvSpPr>
@@ -5999,7 +7326,13 @@
       </p:sp>
       <p:sp>
         <p:nvSpPr>
-          <p:cNvPr id="12" name="TextBox 11"/>
+          <p:cNvPr id="12" name="TextBox 11">
+            <a:extLst>
+              <a:ext uri="{FF2B5EF4-FFF2-40B4-BE49-F238E27FC236}">
+                <a16:creationId xmlns:a16="http://schemas.microsoft.com/office/drawing/2014/main" id="{6CDA00D5-CF69-C4CC-E415-32B7904D830F}"/>
+              </a:ext>
+            </a:extLst>
+          </p:cNvPr>
           <p:cNvSpPr txBox="1"/>
           <p:nvPr/>
         </p:nvSpPr>
@@ -6033,6 +7366,11 @@
         </p:txBody>
       </p:sp>
     </p:spTree>
+    <p:extLst>
+      <p:ext uri="{BB962C8B-B14F-4D97-AF65-F5344CB8AC3E}">
+        <p14:creationId xmlns:p14="http://schemas.microsoft.com/office/powerpoint/2010/main" val="690919332"/>
+      </p:ext>
+    </p:extLst>
   </p:cSld>
   <p:clrMapOvr>
     <a:masterClrMapping/>
@@ -6043,17 +7381,15 @@
 <file path=ppt/slides/slide6.xml><?xml version="1.0" encoding="utf-8"?>
 <p:sld xmlns:a="http://schemas.openxmlformats.org/drawingml/2006/main" xmlns:r="http://schemas.openxmlformats.org/officeDocument/2006/relationships" xmlns:p="http://schemas.openxmlformats.org/presentationml/2006/main">
   <p:cSld>
-    <p:bg>
-      <p:bgPr>
-        <a:solidFill>
-          <a:srgbClr val="F7F7F5"/>
-        </a:solidFill>
-        <a:effectLst/>
-      </p:bgPr>
-    </p:bg>
     <p:spTree>
       <p:nvGrpSpPr>
-        <p:cNvPr id="1" name=""/>
+        <p:cNvPr id="1" name="">
+          <a:extLst>
+            <a:ext uri="{FF2B5EF4-FFF2-40B4-BE49-F238E27FC236}">
+              <a16:creationId xmlns:a16="http://schemas.microsoft.com/office/drawing/2014/main" id="{3DDAD1E0-C7D3-2AD3-1D04-A95D42DE7A8A}"/>
+            </a:ext>
+          </a:extLst>
+        </p:cNvPr>
         <p:cNvGrpSpPr/>
         <p:nvPr/>
       </p:nvGrpSpPr>
@@ -6067,14 +7403,20 @@
       </p:grpSpPr>
       <p:sp>
         <p:nvSpPr>
-          <p:cNvPr id="2" name="Rounded Rectangle 1"/>
+          <p:cNvPr id="2" name="Rounded Rectangle 1">
+            <a:extLst>
+              <a:ext uri="{FF2B5EF4-FFF2-40B4-BE49-F238E27FC236}">
+                <a16:creationId xmlns:a16="http://schemas.microsoft.com/office/drawing/2014/main" id="{46392C83-C2EE-EA74-C7A3-5AE0A15009E7}"/>
+              </a:ext>
+            </a:extLst>
+          </p:cNvPr>
           <p:cNvSpPr/>
           <p:nvPr/>
         </p:nvSpPr>
         <p:spPr>
           <a:xfrm>
             <a:off x="594360" y="475488"/>
-            <a:ext cx="969264" cy="292608"/>
+            <a:ext cx="1627632" cy="292608"/>
           </a:xfrm>
           <a:prstGeom prst="roundRect">
             <a:avLst/>
@@ -6113,14 +7455,20 @@
       </p:sp>
       <p:sp>
         <p:nvSpPr>
-          <p:cNvPr id="3" name="TextBox 2"/>
+          <p:cNvPr id="3" name="TextBox 2">
+            <a:extLst>
+              <a:ext uri="{FF2B5EF4-FFF2-40B4-BE49-F238E27FC236}">
+                <a16:creationId xmlns:a16="http://schemas.microsoft.com/office/drawing/2014/main" id="{87C1B3C7-83D5-5037-D6F5-270E123A1FB0}"/>
+              </a:ext>
+            </a:extLst>
+          </p:cNvPr>
           <p:cNvSpPr txBox="1"/>
           <p:nvPr/>
         </p:nvSpPr>
         <p:spPr>
           <a:xfrm>
-            <a:off x="594360" y="484632"/>
-            <a:ext cx="969264" cy="246888"/>
+            <a:off x="1223030" y="542673"/>
+            <a:ext cx="370294" cy="130805"/>
           </a:xfrm>
           <a:prstGeom prst="rect">
             <a:avLst/>
@@ -6135,27 +7483,39 @@
           <a:p>
             <a:pPr algn="ctr"/>
             <a:r>
-              <a:rPr sz="850" b="1">
+              <a:rPr lang="de-CH" sz="850" b="1" dirty="0">
                 <a:solidFill>
                   <a:srgbClr val="737373"/>
                 </a:solidFill>
                 <a:latin typeface="Aptos"/>
               </a:rPr>
-              <a:t>AUFGABE</a:t>
-            </a:r>
-          </a:p>
-        </p:txBody>
-      </p:sp>
-      <p:sp>
-        <p:nvSpPr>
-          <p:cNvPr id="4" name="TextBox 3"/>
+              <a:t>Theorie</a:t>
+            </a:r>
+            <a:endParaRPr sz="850" b="1" dirty="0">
+              <a:solidFill>
+                <a:srgbClr val="737373"/>
+              </a:solidFill>
+              <a:latin typeface="Aptos"/>
+            </a:endParaRPr>
+          </a:p>
+        </p:txBody>
+      </p:sp>
+      <p:sp>
+        <p:nvSpPr>
+          <p:cNvPr id="4" name="TextBox 3">
+            <a:extLst>
+              <a:ext uri="{FF2B5EF4-FFF2-40B4-BE49-F238E27FC236}">
+                <a16:creationId xmlns:a16="http://schemas.microsoft.com/office/drawing/2014/main" id="{AE7665EB-D53C-E236-7F9E-855C8F03E855}"/>
+              </a:ext>
+            </a:extLst>
+          </p:cNvPr>
           <p:cNvSpPr txBox="1"/>
           <p:nvPr/>
         </p:nvSpPr>
         <p:spPr>
           <a:xfrm>
             <a:off x="594360" y="932688"/>
-            <a:ext cx="10515600" cy="594360"/>
+            <a:ext cx="1384033" cy="477054"/>
           </a:xfrm>
           <a:prstGeom prst="rect">
             <a:avLst/>
@@ -6170,55 +7530,32 @@
           <a:p>
             <a:pPr algn="l"/>
             <a:r>
-              <a:rPr sz="3100" b="1">
+              <a:rPr lang="de-CH" sz="3100" b="1" dirty="0">
                 <a:solidFill>
                   <a:srgbClr val="171717"/>
                 </a:solidFill>
                 <a:latin typeface="Aptos"/>
               </a:rPr>
-              <a:t>Aufgabe [X]</a:t>
-            </a:r>
-          </a:p>
-        </p:txBody>
-      </p:sp>
-      <p:sp>
-        <p:nvSpPr>
-          <p:cNvPr id="5" name="TextBox 4"/>
-          <p:cNvSpPr txBox="1"/>
-          <p:nvPr/>
-        </p:nvSpPr>
-        <p:spPr>
-          <a:xfrm>
-            <a:off x="612648" y="1609344"/>
-            <a:ext cx="9692640" cy="384048"/>
-          </a:xfrm>
-          <a:prstGeom prst="rect">
-            <a:avLst/>
-          </a:prstGeom>
-          <a:noFill/>
-        </p:spPr>
-        <p:txBody>
-          <a:bodyPr wrap="none" lIns="0" tIns="0" rIns="0" bIns="0" anchor="t">
-            <a:spAutoFit/>
-          </a:bodyPr>
-          <a:lstStyle/>
-          <a:p>
-            <a:pPr algn="l"/>
-            <a:r>
-              <a:rPr sz="1350" b="0">
-                <a:solidFill>
-                  <a:srgbClr val="737373"/>
-                </a:solidFill>
-                <a:latin typeface="Aptos"/>
-              </a:rPr>
-              <a:t>Erst kurz selbst probieren.</a:t>
-            </a:r>
+              <a:t>Integral</a:t>
+            </a:r>
+            <a:endParaRPr sz="3100" b="1" dirty="0">
+              <a:solidFill>
+                <a:srgbClr val="171717"/>
+              </a:solidFill>
+              <a:latin typeface="Aptos"/>
+            </a:endParaRPr>
           </a:p>
         </p:txBody>
       </p:sp>
       <p:cxnSp>
         <p:nvCxnSpPr>
-          <p:cNvPr id="6" name="Connector 5"/>
+          <p:cNvPr id="6" name="Connector 5">
+            <a:extLst>
+              <a:ext uri="{FF2B5EF4-FFF2-40B4-BE49-F238E27FC236}">
+                <a16:creationId xmlns:a16="http://schemas.microsoft.com/office/drawing/2014/main" id="{B976664E-7E22-3894-253B-38C4D2D455A1}"/>
+              </a:ext>
+            </a:extLst>
+          </p:cNvPr>
           <p:cNvCxnSpPr/>
           <p:nvPr/>
         </p:nvCxnSpPr>
@@ -6253,7 +7590,13 @@
       </p:cxnSp>
       <p:sp>
         <p:nvSpPr>
-          <p:cNvPr id="7" name="TextBox 6"/>
+          <p:cNvPr id="7" name="TextBox 6">
+            <a:extLst>
+              <a:ext uri="{FF2B5EF4-FFF2-40B4-BE49-F238E27FC236}">
+                <a16:creationId xmlns:a16="http://schemas.microsoft.com/office/drawing/2014/main" id="{BAFD1CCE-0C23-C579-605F-D22302B962AC}"/>
+              </a:ext>
+            </a:extLst>
+          </p:cNvPr>
           <p:cNvSpPr txBox="1"/>
           <p:nvPr/>
         </p:nvSpPr>
@@ -6288,7 +7631,13 @@
       </p:sp>
       <p:sp>
         <p:nvSpPr>
-          <p:cNvPr id="8" name="TextBox 7"/>
+          <p:cNvPr id="8" name="TextBox 7">
+            <a:extLst>
+              <a:ext uri="{FF2B5EF4-FFF2-40B4-BE49-F238E27FC236}">
+                <a16:creationId xmlns:a16="http://schemas.microsoft.com/office/drawing/2014/main" id="{8DB8E4F6-B1AF-1BAF-341B-443D048743F0}"/>
+              </a:ext>
+            </a:extLst>
+          </p:cNvPr>
           <p:cNvSpPr txBox="1"/>
           <p:nvPr/>
         </p:nvSpPr>
@@ -6323,7 +7672,13 @@
       </p:sp>
       <p:sp>
         <p:nvSpPr>
-          <p:cNvPr id="9" name="TextBox 8"/>
+          <p:cNvPr id="9" name="TextBox 8">
+            <a:extLst>
+              <a:ext uri="{FF2B5EF4-FFF2-40B4-BE49-F238E27FC236}">
+                <a16:creationId xmlns:a16="http://schemas.microsoft.com/office/drawing/2014/main" id="{9D1B9DA2-136E-0495-01BC-E7F6B1DBAB54}"/>
+              </a:ext>
+            </a:extLst>
+          </p:cNvPr>
           <p:cNvSpPr txBox="1"/>
           <p:nvPr/>
         </p:nvSpPr>
@@ -6356,28 +7711,101 @@
           </a:p>
         </p:txBody>
       </p:sp>
-      <p:sp>
-        <p:nvSpPr>
-          <p:cNvPr id="10" name="Rounded Rectangle 9"/>
+      <p:pic>
+        <p:nvPicPr>
+          <p:cNvPr id="10" name="Grafik 9" descr="Integralrechnung — Grundwissen Mathematik">
+            <a:extLst>
+              <a:ext uri="{FF2B5EF4-FFF2-40B4-BE49-F238E27FC236}">
+                <a16:creationId xmlns:a16="http://schemas.microsoft.com/office/drawing/2014/main" id="{6AD62731-87F0-1A1A-33FD-98ACCD9900A9}"/>
+              </a:ext>
+            </a:extLst>
+          </p:cNvPr>
+          <p:cNvPicPr>
+            <a:picLocks noChangeAspect="1"/>
+          </p:cNvPicPr>
+          <p:nvPr/>
+        </p:nvPicPr>
+        <p:blipFill>
+          <a:blip r:embed="rId3"/>
+          <a:srcRect r="50581"/>
+          <a:stretch>
+            <a:fillRect/>
+          </a:stretch>
+        </p:blipFill>
+        <p:spPr>
+          <a:xfrm>
+            <a:off x="5301673" y="1955096"/>
+            <a:ext cx="3008965" cy="2947807"/>
+          </a:xfrm>
+          <a:prstGeom prst="rect">
+            <a:avLst/>
+          </a:prstGeom>
+        </p:spPr>
+      </p:pic>
+      <p:pic>
+        <p:nvPicPr>
+          <p:cNvPr id="11" name="Grafik 10" descr="Integralrechnung — Grundwissen Mathematik">
+            <a:extLst>
+              <a:ext uri="{FF2B5EF4-FFF2-40B4-BE49-F238E27FC236}">
+                <a16:creationId xmlns:a16="http://schemas.microsoft.com/office/drawing/2014/main" id="{1F2F6C7B-12A9-1C32-81FD-37C291BE396B}"/>
+              </a:ext>
+            </a:extLst>
+          </p:cNvPr>
+          <p:cNvPicPr>
+            <a:picLocks noChangeAspect="1"/>
+          </p:cNvPicPr>
+          <p:nvPr/>
+        </p:nvPicPr>
+        <p:blipFill>
+          <a:blip r:embed="rId4"/>
+          <a:stretch>
+            <a:fillRect/>
+          </a:stretch>
+        </p:blipFill>
+        <p:spPr>
+          <a:xfrm>
+            <a:off x="8692411" y="2058971"/>
+            <a:ext cx="3342012" cy="2740055"/>
+          </a:xfrm>
+          <a:prstGeom prst="rect">
+            <a:avLst/>
+          </a:prstGeom>
+        </p:spPr>
+      </p:pic>
+      <p:sp>
+        <p:nvSpPr>
+          <p:cNvPr id="13" name="Pfeil: nach rechts 12">
+            <a:extLst>
+              <a:ext uri="{FF2B5EF4-FFF2-40B4-BE49-F238E27FC236}">
+                <a16:creationId xmlns:a16="http://schemas.microsoft.com/office/drawing/2014/main" id="{B9FF1FC3-7017-F95E-DC70-914D291A7E7A}"/>
+              </a:ext>
+            </a:extLst>
+          </p:cNvPr>
           <p:cNvSpPr/>
           <p:nvPr/>
         </p:nvSpPr>
         <p:spPr>
           <a:xfrm>
-            <a:off x="594360" y="2331720"/>
-            <a:ext cx="7315200" cy="3611880"/>
-          </a:xfrm>
-          <a:prstGeom prst="roundRect">
-            <a:avLst/>
-          </a:prstGeom>
-          <a:solidFill>
-            <a:srgbClr val="FFFFFF"/>
-          </a:solidFill>
-          <a:ln w="10160">
-            <a:solidFill>
-              <a:srgbClr val="E8E8E5"/>
-            </a:solidFill>
-          </a:ln>
+            <a:off x="7989455" y="3556000"/>
+            <a:ext cx="785090" cy="138536"/>
+          </a:xfrm>
+          <a:prstGeom prst="rightArrow">
+            <a:avLst/>
+          </a:prstGeom>
+          <a:gradFill>
+            <a:gsLst>
+              <a:gs pos="0">
+                <a:srgbClr val="EEEEEA"/>
+              </a:gs>
+              <a:gs pos="100000">
+                <a:schemeClr val="accent1">
+                  <a:tint val="50000"/>
+                  <a:shade val="100000"/>
+                  <a:satMod val="350000"/>
+                </a:schemeClr>
+              </a:gs>
+            </a:gsLst>
+          </a:gradFill>
         </p:spPr>
         <p:style>
           <a:lnRef idx="1">
@@ -6398,20 +7826,26 @@
           <a:lstStyle/>
           <a:p>
             <a:pPr algn="ctr"/>
-            <a:endParaRPr/>
-          </a:p>
-        </p:txBody>
-      </p:sp>
-      <p:sp>
-        <p:nvSpPr>
-          <p:cNvPr id="11" name="TextBox 10"/>
+            <a:endParaRPr lang="de-CH"/>
+          </a:p>
+        </p:txBody>
+      </p:sp>
+      <p:sp>
+        <p:nvSpPr>
+          <p:cNvPr id="18" name="TextBox 10">
+            <a:extLst>
+              <a:ext uri="{FF2B5EF4-FFF2-40B4-BE49-F238E27FC236}">
+                <a16:creationId xmlns:a16="http://schemas.microsoft.com/office/drawing/2014/main" id="{28184EAE-98CD-6E0E-BD00-FD4B96B17BD1}"/>
+              </a:ext>
+            </a:extLst>
+          </p:cNvPr>
           <p:cNvSpPr txBox="1"/>
           <p:nvPr/>
         </p:nvSpPr>
         <p:spPr>
           <a:xfrm>
-            <a:off x="914400" y="2761488"/>
-            <a:ext cx="6675120" cy="731520"/>
+            <a:off x="612648" y="2799470"/>
+            <a:ext cx="3915495" cy="307777"/>
           </a:xfrm>
           <a:prstGeom prst="rect">
             <a:avLst/>
@@ -6424,66 +7858,68 @@
           </a:bodyPr>
           <a:lstStyle/>
           <a:p>
-            <a:pPr algn="l"/>
-            <a:r>
-              <a:rPr sz="2400" b="1">
+            <a:pPr marL="342900" indent="-342900" algn="l">
+              <a:buFont typeface="Arial" panose="020B0604020202020204" pitchFamily="34" charset="0"/>
+              <a:buChar char="•"/>
+            </a:pPr>
+            <a:r>
+              <a:rPr lang="de-CH" sz="2000" dirty="0">
                 <a:solidFill>
                   <a:srgbClr val="171717"/>
                 </a:solidFill>
                 <a:latin typeface="Aptos"/>
               </a:rPr>
-              <a:t>[Aufgabenstellung]</a:t>
-            </a:r>
-          </a:p>
-        </p:txBody>
-      </p:sp>
-      <p:sp>
-        <p:nvSpPr>
-          <p:cNvPr id="12" name="TextBox 11"/>
-          <p:cNvSpPr txBox="1"/>
-          <p:nvPr/>
-        </p:nvSpPr>
-        <p:spPr>
-          <a:xfrm>
-            <a:off x="914400" y="3749039"/>
-            <a:ext cx="6400800" cy="1051560"/>
-          </a:xfrm>
-          <a:prstGeom prst="rect">
-            <a:avLst/>
-          </a:prstGeom>
-          <a:noFill/>
-        </p:spPr>
-        <p:txBody>
-          <a:bodyPr wrap="none" lIns="0" tIns="0" rIns="0" bIns="0" anchor="t">
-            <a:spAutoFit/>
-          </a:bodyPr>
-          <a:lstStyle/>
-          <a:p>
-            <a:pPr algn="l"/>
-            <a:r>
-              <a:rPr sz="1600" b="0">
-                <a:solidFill>
-                  <a:srgbClr val="737373"/>
-                </a:solidFill>
-                <a:latin typeface="Aptos"/>
-              </a:rPr>
-              <a:t>Gegeben:  [Werte]
-Gesucht:  [Grösse]
-Hinweis:  [optional]</a:t>
-            </a:r>
-          </a:p>
-        </p:txBody>
-      </p:sp>
-      <p:sp>
-        <p:nvSpPr>
-          <p:cNvPr id="13" name="Rounded Rectangle 12"/>
+              <a:t>Integral wie eine Summe denken</a:t>
+            </a:r>
+            <a:endParaRPr sz="2000" b="0" dirty="0">
+              <a:solidFill>
+                <a:srgbClr val="171717"/>
+              </a:solidFill>
+              <a:latin typeface="Aptos"/>
+            </a:endParaRPr>
+          </a:p>
+        </p:txBody>
+      </p:sp>
+    </p:spTree>
+    <p:extLst>
+      <p:ext uri="{BB962C8B-B14F-4D97-AF65-F5344CB8AC3E}">
+        <p14:creationId xmlns:p14="http://schemas.microsoft.com/office/powerpoint/2010/main" val="1459133871"/>
+      </p:ext>
+    </p:extLst>
+  </p:cSld>
+  <p:clrMapOvr>
+    <a:masterClrMapping/>
+  </p:clrMapOvr>
+</p:sld>
+</file>
+
+<file path=ppt/slides/slide7.xml><?xml version="1.0" encoding="utf-8"?>
+<p:sld xmlns:a="http://schemas.openxmlformats.org/drawingml/2006/main" xmlns:r="http://schemas.openxmlformats.org/officeDocument/2006/relationships" xmlns:p="http://schemas.openxmlformats.org/presentationml/2006/main">
+  <p:cSld>
+    <p:spTree>
+      <p:nvGrpSpPr>
+        <p:cNvPr id="1" name=""/>
+        <p:cNvGrpSpPr/>
+        <p:nvPr/>
+      </p:nvGrpSpPr>
+      <p:grpSpPr>
+        <a:xfrm>
+          <a:off x="0" y="0"/>
+          <a:ext cx="0" cy="0"/>
+          <a:chOff x="0" y="0"/>
+          <a:chExt cx="0" cy="0"/>
+        </a:xfrm>
+      </p:grpSpPr>
+      <p:sp>
+        <p:nvSpPr>
+          <p:cNvPr id="2" name="Rounded Rectangle 1"/>
           <p:cNvSpPr/>
           <p:nvPr/>
         </p:nvSpPr>
         <p:spPr>
           <a:xfrm>
-            <a:off x="8183879" y="2331720"/>
-            <a:ext cx="3383280" cy="3611880"/>
+            <a:off x="594360" y="475488"/>
+            <a:ext cx="1042416" cy="292608"/>
           </a:xfrm>
           <a:prstGeom prst="roundRect">
             <a:avLst/>
@@ -6522,14 +7958,49 @@
       </p:sp>
       <p:sp>
         <p:nvSpPr>
-          <p:cNvPr id="14" name="TextBox 13"/>
+          <p:cNvPr id="3" name="TextBox 2"/>
           <p:cNvSpPr txBox="1"/>
           <p:nvPr/>
         </p:nvSpPr>
         <p:spPr>
           <a:xfrm>
-            <a:off x="8549640" y="2926080"/>
-            <a:ext cx="2651760" cy="411480"/>
+            <a:off x="594360" y="484632"/>
+            <a:ext cx="1042416" cy="246888"/>
+          </a:xfrm>
+          <a:prstGeom prst="rect">
+            <a:avLst/>
+          </a:prstGeom>
+          <a:noFill/>
+        </p:spPr>
+        <p:txBody>
+          <a:bodyPr wrap="none" lIns="0" tIns="0" rIns="0" bIns="0" anchor="ctr">
+            <a:spAutoFit/>
+          </a:bodyPr>
+          <a:lstStyle/>
+          <a:p>
+            <a:pPr algn="ctr"/>
+            <a:r>
+              <a:rPr sz="850" b="1">
+                <a:solidFill>
+                  <a:srgbClr val="737373"/>
+                </a:solidFill>
+                <a:latin typeface="Aptos"/>
+              </a:rPr>
+              <a:t>RECHNUNG</a:t>
+            </a:r>
+          </a:p>
+        </p:txBody>
+      </p:sp>
+      <p:sp>
+        <p:nvSpPr>
+          <p:cNvPr id="4" name="TextBox 3"/>
+          <p:cNvSpPr txBox="1"/>
+          <p:nvPr/>
+        </p:nvSpPr>
+        <p:spPr>
+          <a:xfrm>
+            <a:off x="594360" y="932688"/>
+            <a:ext cx="10515600" cy="594360"/>
           </a:xfrm>
           <a:prstGeom prst="rect">
             <a:avLst/>
@@ -6544,27 +8015,27 @@
           <a:p>
             <a:pPr algn="l"/>
             <a:r>
-              <a:rPr sz="2100" b="1">
+              <a:rPr sz="3100" b="1">
                 <a:solidFill>
                   <a:srgbClr val="171717"/>
                 </a:solidFill>
                 <a:latin typeface="Aptos"/>
               </a:rPr>
-              <a:t>3–5 min</a:t>
-            </a:r>
-          </a:p>
-        </p:txBody>
-      </p:sp>
-      <p:sp>
-        <p:nvSpPr>
-          <p:cNvPr id="15" name="TextBox 14"/>
+              <a:t>[Titel]</a:t>
+            </a:r>
+          </a:p>
+        </p:txBody>
+      </p:sp>
+      <p:sp>
+        <p:nvSpPr>
+          <p:cNvPr id="5" name="TextBox 4"/>
           <p:cNvSpPr txBox="1"/>
           <p:nvPr/>
         </p:nvSpPr>
         <p:spPr>
           <a:xfrm>
-            <a:off x="8549640" y="3703320"/>
-            <a:ext cx="2468880" cy="1417320"/>
+            <a:off x="612648" y="1609344"/>
+            <a:ext cx="9692640" cy="384048"/>
           </a:xfrm>
           <a:prstGeom prst="rect">
             <a:avLst/>
@@ -6579,419 +8050,49 @@
           <a:p>
             <a:pPr algn="l"/>
             <a:r>
-              <a:rPr sz="1400" b="0">
+              <a:rPr sz="1350" b="0" dirty="0">
                 <a:solidFill>
                   <a:srgbClr val="737373"/>
                 </a:solidFill>
                 <a:latin typeface="Aptos"/>
               </a:rPr>
-              <a:t>Selbst versuchen.
-1. Skizze
-2. Ansatz
-3. Rechnung</a:t>
-            </a:r>
-          </a:p>
-        </p:txBody>
-      </p:sp>
-    </p:spTree>
-  </p:cSld>
-  <p:clrMapOvr>
-    <a:masterClrMapping/>
-  </p:clrMapOvr>
-</p:sld>
-</file>
-
-<file path=ppt/slides/slide7.xml><?xml version="1.0" encoding="utf-8"?>
-<p:sld xmlns:a="http://schemas.openxmlformats.org/drawingml/2006/main" xmlns:r="http://schemas.openxmlformats.org/officeDocument/2006/relationships" xmlns:p="http://schemas.openxmlformats.org/presentationml/2006/main">
-  <p:cSld>
-    <p:bg>
-      <p:bgPr>
-        <a:solidFill>
-          <a:srgbClr val="171717"/>
-        </a:solidFill>
-        <a:effectLst/>
-      </p:bgPr>
-    </p:bg>
-    <p:spTree>
-      <p:nvGrpSpPr>
-        <p:cNvPr id="1" name=""/>
-        <p:cNvGrpSpPr/>
-        <p:nvPr/>
-      </p:nvGrpSpPr>
-      <p:grpSpPr>
-        <a:xfrm>
-          <a:off x="0" y="0"/>
-          <a:ext cx="0" cy="0"/>
-          <a:chOff x="0" y="0"/>
-          <a:chExt cx="0" cy="0"/>
-        </a:xfrm>
-      </p:grpSpPr>
-      <p:sp>
-        <p:nvSpPr>
-          <p:cNvPr id="2" name="Rounded Rectangle 1"/>
-          <p:cNvSpPr/>
-          <p:nvPr/>
-        </p:nvSpPr>
-        <p:spPr>
-          <a:xfrm>
-            <a:off x="658368" y="658368"/>
-            <a:ext cx="868680" cy="292608"/>
-          </a:xfrm>
-          <a:prstGeom prst="roundRect">
-            <a:avLst/>
-          </a:prstGeom>
-          <a:solidFill>
-            <a:srgbClr val="2D2D2D"/>
-          </a:solidFill>
-          <a:ln w="10160">
-            <a:solidFill>
-              <a:srgbClr val="2D2D2D"/>
-            </a:solidFill>
-          </a:ln>
-        </p:spPr>
-        <p:style>
-          <a:lnRef idx="1">
-            <a:schemeClr val="accent1"/>
-          </a:lnRef>
-          <a:fillRef idx="3">
-            <a:schemeClr val="accent1"/>
-          </a:fillRef>
-          <a:effectRef idx="2">
-            <a:schemeClr val="accent1"/>
-          </a:effectRef>
-          <a:fontRef idx="minor">
-            <a:schemeClr val="lt1"/>
-          </a:fontRef>
-        </p:style>
-        <p:txBody>
-          <a:bodyPr rtlCol="0" anchor="ctr"/>
-          <a:lstStyle/>
-          <a:p>
-            <a:pPr algn="ctr"/>
-            <a:endParaRPr/>
-          </a:p>
-        </p:txBody>
-      </p:sp>
-      <p:sp>
-        <p:nvSpPr>
-          <p:cNvPr id="3" name="TextBox 2"/>
-          <p:cNvSpPr txBox="1"/>
-          <p:nvPr/>
-        </p:nvSpPr>
-        <p:spPr>
-          <a:xfrm>
-            <a:off x="658368" y="667512"/>
-            <a:ext cx="868680" cy="246888"/>
-          </a:xfrm>
-          <a:prstGeom prst="rect">
-            <a:avLst/>
-          </a:prstGeom>
-          <a:noFill/>
-        </p:spPr>
-        <p:txBody>
-          <a:bodyPr wrap="none" lIns="0" tIns="0" rIns="0" bIns="0" anchor="ctr">
-            <a:spAutoFit/>
-          </a:bodyPr>
-          <a:lstStyle/>
-          <a:p>
-            <a:pPr algn="ctr"/>
-            <a:r>
-              <a:rPr sz="850" b="1">
-                <a:solidFill>
-                  <a:srgbClr val="D2D2D2"/>
-                </a:solidFill>
-                <a:latin typeface="Aptos"/>
-              </a:rPr>
-              <a:t>PART 01</a:t>
-            </a:r>
-          </a:p>
-        </p:txBody>
-      </p:sp>
-      <p:sp>
-        <p:nvSpPr>
-          <p:cNvPr id="4" name="TextBox 3"/>
-          <p:cNvSpPr txBox="1"/>
-          <p:nvPr/>
-        </p:nvSpPr>
-        <p:spPr>
-          <a:xfrm>
-            <a:off x="658368" y="1481328"/>
-            <a:ext cx="7498079" cy="822960"/>
-          </a:xfrm>
-          <a:prstGeom prst="rect">
-            <a:avLst/>
-          </a:prstGeom>
-          <a:noFill/>
-        </p:spPr>
-        <p:txBody>
-          <a:bodyPr wrap="none" lIns="0" tIns="0" rIns="0" bIns="0" anchor="t">
-            <a:spAutoFit/>
-          </a:bodyPr>
-          <a:lstStyle/>
-          <a:p>
-            <a:pPr algn="l"/>
-            <a:r>
-              <a:rPr sz="4100" b="1">
-                <a:solidFill>
-                  <a:srgbClr val="FFFFFF"/>
-                </a:solidFill>
-                <a:latin typeface="Aptos"/>
-              </a:rPr>
-              <a:t>[Neuer Abschnitt]</a:t>
-            </a:r>
-          </a:p>
-        </p:txBody>
-      </p:sp>
-      <p:sp>
-        <p:nvSpPr>
-          <p:cNvPr id="5" name="TextBox 4"/>
-          <p:cNvSpPr txBox="1"/>
-          <p:nvPr/>
-        </p:nvSpPr>
-        <p:spPr>
-          <a:xfrm>
-            <a:off x="685800" y="2514600"/>
-            <a:ext cx="7772400" cy="411480"/>
-          </a:xfrm>
-          <a:prstGeom prst="rect">
-            <a:avLst/>
-          </a:prstGeom>
-          <a:noFill/>
-        </p:spPr>
-        <p:txBody>
-          <a:bodyPr wrap="none" lIns="0" tIns="0" rIns="0" bIns="0" anchor="t">
-            <a:spAutoFit/>
-          </a:bodyPr>
-          <a:lstStyle/>
-          <a:p>
-            <a:pPr algn="l"/>
-            <a:r>
-              <a:rPr sz="1500" b="0">
-                <a:solidFill>
-                  <a:srgbClr val="CDCDCD"/>
-                </a:solidFill>
-                <a:latin typeface="Aptos"/>
-              </a:rPr>
-              <a:t>[z. B. Aufgabe 2 · Wechselstromrechnung]</a:t>
-            </a:r>
-          </a:p>
-        </p:txBody>
-      </p:sp>
-      <p:sp>
-        <p:nvSpPr>
-          <p:cNvPr id="6" name="TextBox 5"/>
-          <p:cNvSpPr txBox="1"/>
-          <p:nvPr/>
-        </p:nvSpPr>
-        <p:spPr>
-          <a:xfrm>
-            <a:off x="10652760" y="5440680"/>
-            <a:ext cx="640080" cy="411480"/>
-          </a:xfrm>
-          <a:prstGeom prst="rect">
-            <a:avLst/>
-          </a:prstGeom>
-          <a:noFill/>
-        </p:spPr>
-        <p:txBody>
-          <a:bodyPr wrap="none" lIns="0" tIns="0" rIns="0" bIns="0" anchor="t">
-            <a:spAutoFit/>
-          </a:bodyPr>
-          <a:lstStyle/>
-          <a:p>
-            <a:pPr algn="r"/>
-            <a:r>
-              <a:rPr sz="2300" b="1">
-                <a:solidFill>
-                  <a:srgbClr val="CDCDCD"/>
-                </a:solidFill>
-                <a:latin typeface="Aptos"/>
-              </a:rPr>
-              <a:t>01</a:t>
-            </a:r>
-          </a:p>
-        </p:txBody>
-      </p:sp>
-    </p:spTree>
-  </p:cSld>
-  <p:clrMapOvr>
-    <a:masterClrMapping/>
-  </p:clrMapOvr>
-</p:sld>
-</file>
-
-<file path=ppt/slides/slide8.xml><?xml version="1.0" encoding="utf-8"?>
-<p:sld xmlns:a="http://schemas.openxmlformats.org/drawingml/2006/main" xmlns:r="http://schemas.openxmlformats.org/officeDocument/2006/relationships" xmlns:p="http://schemas.openxmlformats.org/presentationml/2006/main">
-  <p:cSld>
-    <p:bg>
-      <p:bgPr>
-        <a:solidFill>
-          <a:srgbClr val="F7F7F5"/>
-        </a:solidFill>
-        <a:effectLst/>
-      </p:bgPr>
-    </p:bg>
-    <p:spTree>
-      <p:nvGrpSpPr>
-        <p:cNvPr id="1" name=""/>
-        <p:cNvGrpSpPr/>
-        <p:nvPr/>
-      </p:nvGrpSpPr>
-      <p:grpSpPr>
-        <a:xfrm>
-          <a:off x="0" y="0"/>
-          <a:ext cx="0" cy="0"/>
-          <a:chOff x="0" y="0"/>
-          <a:chExt cx="0" cy="0"/>
-        </a:xfrm>
-      </p:grpSpPr>
-      <p:sp>
-        <p:nvSpPr>
-          <p:cNvPr id="2" name="Rounded Rectangle 1"/>
-          <p:cNvSpPr/>
-          <p:nvPr/>
-        </p:nvSpPr>
-        <p:spPr>
-          <a:xfrm>
-            <a:off x="594360" y="475488"/>
-            <a:ext cx="969264" cy="292608"/>
-          </a:xfrm>
-          <a:prstGeom prst="roundRect">
-            <a:avLst/>
-          </a:prstGeom>
-          <a:solidFill>
-            <a:srgbClr val="EEEEEA"/>
-          </a:solidFill>
-          <a:ln w="10160">
-            <a:solidFill>
-              <a:srgbClr val="EEEEEA"/>
-            </a:solidFill>
-          </a:ln>
-        </p:spPr>
-        <p:style>
-          <a:lnRef idx="1">
-            <a:schemeClr val="accent1"/>
-          </a:lnRef>
-          <a:fillRef idx="3">
-            <a:schemeClr val="accent1"/>
-          </a:fillRef>
-          <a:effectRef idx="2">
-            <a:schemeClr val="accent1"/>
-          </a:effectRef>
-          <a:fontRef idx="minor">
-            <a:schemeClr val="lt1"/>
-          </a:fontRef>
-        </p:style>
-        <p:txBody>
-          <a:bodyPr rtlCol="0" anchor="ctr"/>
-          <a:lstStyle/>
-          <a:p>
-            <a:pPr algn="ctr"/>
-            <a:endParaRPr/>
-          </a:p>
-        </p:txBody>
-      </p:sp>
-      <p:sp>
-        <p:nvSpPr>
-          <p:cNvPr id="3" name="TextBox 2"/>
-          <p:cNvSpPr txBox="1"/>
-          <p:nvPr/>
-        </p:nvSpPr>
-        <p:spPr>
-          <a:xfrm>
-            <a:off x="594360" y="484632"/>
-            <a:ext cx="969264" cy="246888"/>
-          </a:xfrm>
-          <a:prstGeom prst="rect">
-            <a:avLst/>
-          </a:prstGeom>
-          <a:noFill/>
-        </p:spPr>
-        <p:txBody>
-          <a:bodyPr wrap="none" lIns="0" tIns="0" rIns="0" bIns="0" anchor="ctr">
-            <a:spAutoFit/>
-          </a:bodyPr>
-          <a:lstStyle/>
-          <a:p>
-            <a:pPr algn="ctr"/>
-            <a:r>
-              <a:rPr sz="850" b="1">
+              <a:t>[optional: </a:t>
+            </a:r>
+            <a:r>
+              <a:rPr sz="1350" b="0" dirty="0" err="1">
                 <a:solidFill>
                   <a:srgbClr val="737373"/>
                 </a:solidFill>
                 <a:latin typeface="Aptos"/>
               </a:rPr>
-              <a:t>AM ENDE</a:t>
-            </a:r>
-          </a:p>
-        </p:txBody>
-      </p:sp>
-      <p:sp>
-        <p:nvSpPr>
-          <p:cNvPr id="4" name="TextBox 3"/>
-          <p:cNvSpPr txBox="1"/>
-          <p:nvPr/>
-        </p:nvSpPr>
-        <p:spPr>
-          <a:xfrm>
-            <a:off x="594360" y="932688"/>
-            <a:ext cx="10515600" cy="594360"/>
-          </a:xfrm>
-          <a:prstGeom prst="rect">
-            <a:avLst/>
-          </a:prstGeom>
-          <a:noFill/>
-        </p:spPr>
-        <p:txBody>
-          <a:bodyPr wrap="none" lIns="0" tIns="0" rIns="0" bIns="0" anchor="t">
-            <a:spAutoFit/>
-          </a:bodyPr>
-          <a:lstStyle/>
-          <a:p>
-            <a:pPr algn="l"/>
-            <a:r>
-              <a:rPr sz="3100" b="1">
-                <a:solidFill>
-                  <a:srgbClr val="171717"/>
-                </a:solidFill>
-                <a:latin typeface="Aptos"/>
-              </a:rPr>
-              <a:t>Takeaways</a:t>
-            </a:r>
-          </a:p>
-        </p:txBody>
-      </p:sp>
-      <p:sp>
-        <p:nvSpPr>
-          <p:cNvPr id="5" name="TextBox 4"/>
-          <p:cNvSpPr txBox="1"/>
-          <p:nvPr/>
-        </p:nvSpPr>
-        <p:spPr>
-          <a:xfrm>
-            <a:off x="612648" y="1609344"/>
-            <a:ext cx="9692640" cy="384048"/>
-          </a:xfrm>
-          <a:prstGeom prst="rect">
-            <a:avLst/>
-          </a:prstGeom>
-          <a:noFill/>
-        </p:spPr>
-        <p:txBody>
-          <a:bodyPr wrap="none" lIns="0" tIns="0" rIns="0" bIns="0" anchor="t">
-            <a:spAutoFit/>
-          </a:bodyPr>
-          <a:lstStyle/>
-          <a:p>
-            <a:pPr algn="l"/>
-            <a:r>
-              <a:rPr sz="1350" b="0">
+              <a:t>kurzer</a:t>
+            </a:r>
+            <a:r>
+              <a:rPr sz="1350" b="0" dirty="0">
                 <a:solidFill>
                   <a:srgbClr val="737373"/>
                 </a:solidFill>
                 <a:latin typeface="Aptos"/>
               </a:rPr>
-              <a:t>Drei Dinge, die heute sitzen sollten.</a:t>
+              <a:t> </a:t>
+            </a:r>
+            <a:r>
+              <a:rPr sz="1350" b="0" dirty="0" err="1">
+                <a:solidFill>
+                  <a:srgbClr val="737373"/>
+                </a:solidFill>
+                <a:latin typeface="Aptos"/>
+              </a:rPr>
+              <a:t>Kontext</a:t>
+            </a:r>
+            <a:r>
+              <a:rPr sz="1350" b="0" dirty="0">
+                <a:solidFill>
+                  <a:srgbClr val="737373"/>
+                </a:solidFill>
+                <a:latin typeface="Aptos"/>
+              </a:rPr>
+              <a:t>]</a:t>
             </a:r>
           </a:p>
         </p:txBody>
@@ -7138,24 +8239,131 @@
       </p:sp>
       <p:sp>
         <p:nvSpPr>
-          <p:cNvPr id="10" name="Rounded Rectangle 9"/>
+          <p:cNvPr id="11" name="TextBox 10"/>
+          <p:cNvSpPr txBox="1"/>
+          <p:nvPr/>
+        </p:nvSpPr>
+        <p:spPr>
+          <a:xfrm>
+            <a:off x="914400" y="2880360"/>
+            <a:ext cx="10332720" cy="1051560"/>
+          </a:xfrm>
+          <a:prstGeom prst="rect">
+            <a:avLst/>
+          </a:prstGeom>
+          <a:noFill/>
+        </p:spPr>
+        <p:txBody>
+          <a:bodyPr wrap="none" lIns="0" tIns="0" rIns="0" bIns="0" anchor="ctr">
+            <a:spAutoFit/>
+          </a:bodyPr>
+          <a:lstStyle/>
+          <a:p>
+            <a:pPr algn="ctr"/>
+            <a:r>
+              <a:rPr sz="2900" b="1">
+                <a:solidFill>
+                  <a:srgbClr val="171717"/>
+                </a:solidFill>
+                <a:latin typeface="Aptos"/>
+              </a:rPr>
+              <a:t>[Formel / Rechnung / Lösungsweg]</a:t>
+            </a:r>
+          </a:p>
+        </p:txBody>
+      </p:sp>
+      <p:sp>
+        <p:nvSpPr>
+          <p:cNvPr id="12" name="TextBox 11"/>
+          <p:cNvSpPr txBox="1"/>
+          <p:nvPr/>
+        </p:nvSpPr>
+        <p:spPr>
+          <a:xfrm>
+            <a:off x="914400" y="4315968"/>
+            <a:ext cx="10332720" cy="457200"/>
+          </a:xfrm>
+          <a:prstGeom prst="rect">
+            <a:avLst/>
+          </a:prstGeom>
+          <a:noFill/>
+        </p:spPr>
+        <p:txBody>
+          <a:bodyPr wrap="none" lIns="0" tIns="0" rIns="0" bIns="0" anchor="t">
+            <a:spAutoFit/>
+          </a:bodyPr>
+          <a:lstStyle/>
+          <a:p>
+            <a:pPr algn="ctr"/>
+            <a:r>
+              <a:rPr sz="1400" b="0">
+                <a:solidFill>
+                  <a:srgbClr val="737373"/>
+                </a:solidFill>
+                <a:latin typeface="Aptos"/>
+              </a:rPr>
+              <a:t>Zwischenschritte / kurze Hinweise</a:t>
+            </a:r>
+          </a:p>
+        </p:txBody>
+      </p:sp>
+    </p:spTree>
+  </p:cSld>
+  <p:clrMapOvr>
+    <a:masterClrMapping/>
+  </p:clrMapOvr>
+</p:sld>
+</file>
+
+<file path=ppt/slides/slide8.xml><?xml version="1.0" encoding="utf-8"?>
+<p:sld xmlns:a="http://schemas.openxmlformats.org/drawingml/2006/main" xmlns:r="http://schemas.openxmlformats.org/officeDocument/2006/relationships" xmlns:p="http://schemas.openxmlformats.org/presentationml/2006/main">
+  <p:cSld>
+    <p:spTree>
+      <p:nvGrpSpPr>
+        <p:cNvPr id="1" name="">
+          <a:extLst>
+            <a:ext uri="{FF2B5EF4-FFF2-40B4-BE49-F238E27FC236}">
+              <a16:creationId xmlns:a16="http://schemas.microsoft.com/office/drawing/2014/main" id="{DB6722F0-F169-7CA2-DFE7-44A3328F54C6}"/>
+            </a:ext>
+          </a:extLst>
+        </p:cNvPr>
+        <p:cNvGrpSpPr/>
+        <p:nvPr/>
+      </p:nvGrpSpPr>
+      <p:grpSpPr>
+        <a:xfrm>
+          <a:off x="0" y="0"/>
+          <a:ext cx="0" cy="0"/>
+          <a:chOff x="0" y="0"/>
+          <a:chExt cx="0" cy="0"/>
+        </a:xfrm>
+      </p:grpSpPr>
+      <p:sp>
+        <p:nvSpPr>
+          <p:cNvPr id="2" name="Rounded Rectangle 1">
+            <a:extLst>
+              <a:ext uri="{FF2B5EF4-FFF2-40B4-BE49-F238E27FC236}">
+                <a16:creationId xmlns:a16="http://schemas.microsoft.com/office/drawing/2014/main" id="{F594C877-0D6E-80E6-6118-3EAD847C3A3F}"/>
+              </a:ext>
+            </a:extLst>
+          </p:cNvPr>
           <p:cNvSpPr/>
           <p:nvPr/>
         </p:nvSpPr>
         <p:spPr>
           <a:xfrm>
-            <a:off x="594360" y="2423160"/>
-            <a:ext cx="3401568" cy="2057400"/>
+            <a:off x="594360" y="475488"/>
+            <a:ext cx="1627632" cy="292608"/>
           </a:xfrm>
           <a:prstGeom prst="roundRect">
             <a:avLst/>
           </a:prstGeom>
           <a:solidFill>
-            <a:srgbClr val="FFFFFF"/>
+            <a:srgbClr val="EEEEEA"/>
           </a:solidFill>
           <a:ln w="10160">
             <a:solidFill>
-              <a:srgbClr val="E8E8E5"/>
+              <a:srgbClr val="EEEEEA"/>
             </a:solidFill>
           </a:ln>
         </p:spPr>
@@ -7184,14 +8392,67 @@
       </p:sp>
       <p:sp>
         <p:nvSpPr>
-          <p:cNvPr id="11" name="TextBox 10"/>
+          <p:cNvPr id="3" name="TextBox 2">
+            <a:extLst>
+              <a:ext uri="{FF2B5EF4-FFF2-40B4-BE49-F238E27FC236}">
+                <a16:creationId xmlns:a16="http://schemas.microsoft.com/office/drawing/2014/main" id="{B3991BFA-204D-864A-B5C3-95D9E798F6B4}"/>
+              </a:ext>
+            </a:extLst>
+          </p:cNvPr>
           <p:cNvSpPr txBox="1"/>
           <p:nvPr/>
         </p:nvSpPr>
         <p:spPr>
           <a:xfrm>
-            <a:off x="841248" y="2697480"/>
-            <a:ext cx="457200" cy="274320"/>
+            <a:off x="1223030" y="542673"/>
+            <a:ext cx="370294" cy="130805"/>
+          </a:xfrm>
+          <a:prstGeom prst="rect">
+            <a:avLst/>
+          </a:prstGeom>
+          <a:noFill/>
+        </p:spPr>
+        <p:txBody>
+          <a:bodyPr wrap="none" lIns="0" tIns="0" rIns="0" bIns="0" anchor="ctr">
+            <a:spAutoFit/>
+          </a:bodyPr>
+          <a:lstStyle/>
+          <a:p>
+            <a:pPr algn="ctr"/>
+            <a:r>
+              <a:rPr lang="de-CH" sz="850" b="1" dirty="0">
+                <a:solidFill>
+                  <a:srgbClr val="737373"/>
+                </a:solidFill>
+                <a:latin typeface="Aptos"/>
+              </a:rPr>
+              <a:t>Theorie</a:t>
+            </a:r>
+            <a:endParaRPr sz="850" b="1" dirty="0">
+              <a:solidFill>
+                <a:srgbClr val="737373"/>
+              </a:solidFill>
+              <a:latin typeface="Aptos"/>
+            </a:endParaRPr>
+          </a:p>
+        </p:txBody>
+      </p:sp>
+      <p:sp>
+        <p:nvSpPr>
+          <p:cNvPr id="4" name="TextBox 3">
+            <a:extLst>
+              <a:ext uri="{FF2B5EF4-FFF2-40B4-BE49-F238E27FC236}">
+                <a16:creationId xmlns:a16="http://schemas.microsoft.com/office/drawing/2014/main" id="{E61669D4-ADDB-A7A3-09C6-526A38CCF6F8}"/>
+              </a:ext>
+            </a:extLst>
+          </p:cNvPr>
+          <p:cNvSpPr txBox="1"/>
+          <p:nvPr/>
+        </p:nvSpPr>
+        <p:spPr>
+          <a:xfrm>
+            <a:off x="594360" y="932688"/>
+            <a:ext cx="2365071" cy="477054"/>
           </a:xfrm>
           <a:prstGeom prst="rect">
             <a:avLst/>
@@ -7206,27 +8467,80 @@
           <a:p>
             <a:pPr algn="l"/>
             <a:r>
-              <a:rPr sz="1000" b="1">
-                <a:solidFill>
-                  <a:srgbClr val="737373"/>
-                </a:solidFill>
-                <a:latin typeface="Aptos"/>
-              </a:rPr>
-              <a:t>01</a:t>
-            </a:r>
-          </a:p>
-        </p:txBody>
-      </p:sp>
-      <p:sp>
-        <p:nvSpPr>
-          <p:cNvPr id="12" name="TextBox 11"/>
+              <a:rPr lang="de-CH" sz="3100" b="1" dirty="0" err="1">
+                <a:solidFill>
+                  <a:srgbClr val="171717"/>
+                </a:solidFill>
+                <a:latin typeface="Aptos"/>
+              </a:rPr>
+              <a:t>Linenintegral</a:t>
+            </a:r>
+            <a:endParaRPr sz="3100" b="1" dirty="0">
+              <a:solidFill>
+                <a:srgbClr val="171717"/>
+              </a:solidFill>
+              <a:latin typeface="Aptos"/>
+            </a:endParaRPr>
+          </a:p>
+        </p:txBody>
+      </p:sp>
+      <p:cxnSp>
+        <p:nvCxnSpPr>
+          <p:cNvPr id="6" name="Connector 5">
+            <a:extLst>
+              <a:ext uri="{FF2B5EF4-FFF2-40B4-BE49-F238E27FC236}">
+                <a16:creationId xmlns:a16="http://schemas.microsoft.com/office/drawing/2014/main" id="{370106A4-D450-AFF9-D21A-C8B53D4DFA2E}"/>
+              </a:ext>
+            </a:extLst>
+          </p:cNvPr>
+          <p:cNvCxnSpPr/>
+          <p:nvPr/>
+        </p:nvCxnSpPr>
+        <p:spPr>
+          <a:xfrm>
+            <a:off x="594360" y="6446520"/>
+            <a:ext cx="10972800" cy="0"/>
+          </a:xfrm>
+          <a:prstGeom prst="line">
+            <a:avLst/>
+          </a:prstGeom>
+          <a:ln w="12700">
+            <a:solidFill>
+              <a:srgbClr val="E8E8E5"/>
+            </a:solidFill>
+          </a:ln>
+        </p:spPr>
+        <p:style>
+          <a:lnRef idx="2">
+            <a:schemeClr val="accent1"/>
+          </a:lnRef>
+          <a:fillRef idx="0">
+            <a:schemeClr val="accent1"/>
+          </a:fillRef>
+          <a:effectRef idx="1">
+            <a:schemeClr val="accent1"/>
+          </a:effectRef>
+          <a:fontRef idx="minor">
+            <a:schemeClr val="tx1"/>
+          </a:fontRef>
+        </p:style>
+      </p:cxnSp>
+      <p:sp>
+        <p:nvSpPr>
+          <p:cNvPr id="7" name="TextBox 6">
+            <a:extLst>
+              <a:ext uri="{FF2B5EF4-FFF2-40B4-BE49-F238E27FC236}">
+                <a16:creationId xmlns:a16="http://schemas.microsoft.com/office/drawing/2014/main" id="{85222E29-BA64-EE7B-0EFF-5E21174E726C}"/>
+              </a:ext>
+            </a:extLst>
+          </p:cNvPr>
           <p:cNvSpPr txBox="1"/>
           <p:nvPr/>
         </p:nvSpPr>
         <p:spPr>
           <a:xfrm>
-            <a:off x="841248" y="3246120"/>
-            <a:ext cx="2788920" cy="731520"/>
+            <a:off x="594360" y="6492240"/>
+            <a:ext cx="1554480" cy="201168"/>
           </a:xfrm>
           <a:prstGeom prst="rect">
             <a:avLst/>
@@ -7241,37 +8555,268 @@
           <a:p>
             <a:pPr algn="l"/>
             <a:r>
-              <a:rPr sz="1800" b="1">
+              <a:rPr sz="850" b="1">
+                <a:solidFill>
+                  <a:srgbClr val="737373"/>
+                </a:solidFill>
+                <a:latin typeface="Aptos"/>
+              </a:rPr>
+              <a:t>NUS1 · ÜBUNG</a:t>
+            </a:r>
+          </a:p>
+        </p:txBody>
+      </p:sp>
+      <p:sp>
+        <p:nvSpPr>
+          <p:cNvPr id="8" name="TextBox 7">
+            <a:extLst>
+              <a:ext uri="{FF2B5EF4-FFF2-40B4-BE49-F238E27FC236}">
+                <a16:creationId xmlns:a16="http://schemas.microsoft.com/office/drawing/2014/main" id="{C84B9399-AA0E-98D7-CF8A-4DE933736626}"/>
+              </a:ext>
+            </a:extLst>
+          </p:cNvPr>
+          <p:cNvSpPr txBox="1"/>
+          <p:nvPr/>
+        </p:nvSpPr>
+        <p:spPr>
+          <a:xfrm>
+            <a:off x="10074075" y="6492240"/>
+            <a:ext cx="578685" cy="130805"/>
+          </a:xfrm>
+          <a:prstGeom prst="rect">
+            <a:avLst/>
+          </a:prstGeom>
+          <a:noFill/>
+        </p:spPr>
+        <p:txBody>
+          <a:bodyPr wrap="none" lIns="0" tIns="0" rIns="0" bIns="0" anchor="t">
+            <a:spAutoFit/>
+          </a:bodyPr>
+          <a:lstStyle/>
+          <a:p>
+            <a:pPr algn="r"/>
+            <a:r>
+              <a:rPr sz="850" b="0" dirty="0">
+                <a:solidFill>
+                  <a:srgbClr val="737373"/>
+                </a:solidFill>
+                <a:latin typeface="Aptos"/>
+              </a:rPr>
+              <a:t>Enrico Putzi </a:t>
+            </a:r>
+          </a:p>
+        </p:txBody>
+      </p:sp>
+      <p:sp>
+        <p:nvSpPr>
+          <p:cNvPr id="9" name="TextBox 8">
+            <a:extLst>
+              <a:ext uri="{FF2B5EF4-FFF2-40B4-BE49-F238E27FC236}">
+                <a16:creationId xmlns:a16="http://schemas.microsoft.com/office/drawing/2014/main" id="{D36447ED-26E2-66D0-01E8-9994F556DD22}"/>
+              </a:ext>
+            </a:extLst>
+          </p:cNvPr>
+          <p:cNvSpPr txBox="1"/>
+          <p:nvPr/>
+        </p:nvSpPr>
+        <p:spPr>
+          <a:xfrm>
+            <a:off x="10835640" y="6492240"/>
+            <a:ext cx="731520" cy="201168"/>
+          </a:xfrm>
+          <a:prstGeom prst="rect">
+            <a:avLst/>
+          </a:prstGeom>
+          <a:noFill/>
+        </p:spPr>
+        <p:txBody>
+          <a:bodyPr wrap="none" lIns="0" tIns="0" rIns="0" bIns="0" anchor="t">
+            <a:spAutoFit/>
+          </a:bodyPr>
+          <a:lstStyle/>
+          <a:p>
+            <a:pPr algn="r"/>
+            <a:r>
+              <a:rPr sz="850" b="1">
+                <a:solidFill>
+                  <a:srgbClr val="737373"/>
+                </a:solidFill>
+                <a:latin typeface="Aptos"/>
+              </a:rPr>
+              <a:t>W01</a:t>
+            </a:r>
+          </a:p>
+        </p:txBody>
+      </p:sp>
+      <p:sp>
+        <p:nvSpPr>
+          <p:cNvPr id="18" name="TextBox 10">
+            <a:extLst>
+              <a:ext uri="{FF2B5EF4-FFF2-40B4-BE49-F238E27FC236}">
+                <a16:creationId xmlns:a16="http://schemas.microsoft.com/office/drawing/2014/main" id="{C11E2700-23BA-2B34-8340-9D7EF68A4520}"/>
+              </a:ext>
+            </a:extLst>
+          </p:cNvPr>
+          <p:cNvSpPr txBox="1"/>
+          <p:nvPr/>
+        </p:nvSpPr>
+        <p:spPr>
+          <a:xfrm>
+            <a:off x="612648" y="2799470"/>
+            <a:ext cx="3946593" cy="923330"/>
+          </a:xfrm>
+          <a:prstGeom prst="rect">
+            <a:avLst/>
+          </a:prstGeom>
+          <a:noFill/>
+        </p:spPr>
+        <p:txBody>
+          <a:bodyPr wrap="none" lIns="0" tIns="0" rIns="0" bIns="0" anchor="t">
+            <a:spAutoFit/>
+          </a:bodyPr>
+          <a:lstStyle/>
+          <a:p>
+            <a:pPr marL="342900" indent="-342900" algn="l">
+              <a:buFont typeface="Arial" panose="020B0604020202020204" pitchFamily="34" charset="0"/>
+              <a:buChar char="•"/>
+            </a:pPr>
+            <a:r>
+              <a:rPr lang="de-CH" sz="2000" b="0" dirty="0">
                 <a:solidFill>
                   <a:srgbClr val="171717"/>
                 </a:solidFill>
                 <a:latin typeface="Aptos"/>
               </a:rPr>
-              <a:t>[Kernaussage 1]</a:t>
-            </a:r>
-          </a:p>
-        </p:txBody>
-      </p:sp>
-      <p:sp>
-        <p:nvSpPr>
-          <p:cNvPr id="13" name="Rounded Rectangle 12"/>
+              <a:t>Man summiert</a:t>
+            </a:r>
+            <a:r>
+              <a:rPr lang="de-CH" sz="2000" dirty="0">
+                <a:solidFill>
+                  <a:srgbClr val="171717"/>
+                </a:solidFill>
+                <a:latin typeface="Aptos"/>
+              </a:rPr>
+              <a:t> entlang des Wegs</a:t>
+            </a:r>
+          </a:p>
+          <a:p>
+            <a:pPr marL="342900" indent="-342900" algn="l">
+              <a:buFont typeface="Arial" panose="020B0604020202020204" pitchFamily="34" charset="0"/>
+              <a:buChar char="•"/>
+            </a:pPr>
+            <a:endParaRPr lang="de-CH" sz="2000" dirty="0">
+              <a:solidFill>
+                <a:srgbClr val="171717"/>
+              </a:solidFill>
+              <a:latin typeface="Aptos"/>
+            </a:endParaRPr>
+          </a:p>
+          <a:p>
+            <a:pPr marL="342900" indent="-342900" algn="l">
+              <a:buFont typeface="Arial" panose="020B0604020202020204" pitchFamily="34" charset="0"/>
+              <a:buChar char="•"/>
+            </a:pPr>
+            <a:endParaRPr sz="2000" b="0" dirty="0">
+              <a:solidFill>
+                <a:srgbClr val="171717"/>
+              </a:solidFill>
+              <a:latin typeface="Aptos"/>
+            </a:endParaRPr>
+          </a:p>
+        </p:txBody>
+      </p:sp>
+      <p:pic>
+        <p:nvPicPr>
+          <p:cNvPr id="5" name="Grafik 4" descr="Linienintegral 1">
+            <a:extLst>
+              <a:ext uri="{FF2B5EF4-FFF2-40B4-BE49-F238E27FC236}">
+                <a16:creationId xmlns:a16="http://schemas.microsoft.com/office/drawing/2014/main" id="{7B4247C1-B005-BFA6-280C-5D9B770D536B}"/>
+              </a:ext>
+            </a:extLst>
+          </p:cNvPr>
+          <p:cNvPicPr>
+            <a:picLocks noChangeAspect="1"/>
+          </p:cNvPicPr>
+          <p:nvPr/>
+        </p:nvPicPr>
+        <p:blipFill>
+          <a:blip r:embed="rId3"/>
+          <a:stretch>
+            <a:fillRect/>
+          </a:stretch>
+        </p:blipFill>
+        <p:spPr>
+          <a:xfrm>
+            <a:off x="7028873" y="597579"/>
+            <a:ext cx="3230795" cy="5327112"/>
+          </a:xfrm>
+          <a:prstGeom prst="rect">
+            <a:avLst/>
+          </a:prstGeom>
+        </p:spPr>
+      </p:pic>
+    </p:spTree>
+    <p:extLst>
+      <p:ext uri="{BB962C8B-B14F-4D97-AF65-F5344CB8AC3E}">
+        <p14:creationId xmlns:p14="http://schemas.microsoft.com/office/powerpoint/2010/main" val="3301125587"/>
+      </p:ext>
+    </p:extLst>
+  </p:cSld>
+  <p:clrMapOvr>
+    <a:masterClrMapping/>
+  </p:clrMapOvr>
+</p:sld>
+</file>
+
+<file path=ppt/slides/slide9.xml><?xml version="1.0" encoding="utf-8"?>
+<p:sld xmlns:a="http://schemas.openxmlformats.org/drawingml/2006/main" xmlns:r="http://schemas.openxmlformats.org/officeDocument/2006/relationships" xmlns:p="http://schemas.openxmlformats.org/presentationml/2006/main">
+  <p:cSld>
+    <p:spTree>
+      <p:nvGrpSpPr>
+        <p:cNvPr id="1" name="">
+          <a:extLst>
+            <a:ext uri="{FF2B5EF4-FFF2-40B4-BE49-F238E27FC236}">
+              <a16:creationId xmlns:a16="http://schemas.microsoft.com/office/drawing/2014/main" id="{28BEFDD7-627B-8DBC-712D-8597884051B3}"/>
+            </a:ext>
+          </a:extLst>
+        </p:cNvPr>
+        <p:cNvGrpSpPr/>
+        <p:nvPr/>
+      </p:nvGrpSpPr>
+      <p:grpSpPr>
+        <a:xfrm>
+          <a:off x="0" y="0"/>
+          <a:ext cx="0" cy="0"/>
+          <a:chOff x="0" y="0"/>
+          <a:chExt cx="0" cy="0"/>
+        </a:xfrm>
+      </p:grpSpPr>
+      <p:sp>
+        <p:nvSpPr>
+          <p:cNvPr id="2" name="Rounded Rectangle 1">
+            <a:extLst>
+              <a:ext uri="{FF2B5EF4-FFF2-40B4-BE49-F238E27FC236}">
+                <a16:creationId xmlns:a16="http://schemas.microsoft.com/office/drawing/2014/main" id="{1BD2FA91-ABDB-2278-DC1A-D9625A9ACD8E}"/>
+              </a:ext>
+            </a:extLst>
+          </p:cNvPr>
           <p:cNvSpPr/>
           <p:nvPr/>
         </p:nvSpPr>
         <p:spPr>
           <a:xfrm>
-            <a:off x="4297680" y="2423160"/>
-            <a:ext cx="3401568" cy="2057400"/>
+            <a:off x="594360" y="475488"/>
+            <a:ext cx="1627632" cy="292608"/>
           </a:xfrm>
           <a:prstGeom prst="roundRect">
             <a:avLst/>
           </a:prstGeom>
           <a:solidFill>
-            <a:srgbClr val="FFFFFF"/>
+            <a:srgbClr val="EEEEEA"/>
           </a:solidFill>
           <a:ln w="10160">
             <a:solidFill>
-              <a:srgbClr val="E8E8E5"/>
+              <a:srgbClr val="EEEEEA"/>
             </a:solidFill>
           </a:ln>
         </p:spPr>
@@ -7300,14 +8845,67 @@
       </p:sp>
       <p:sp>
         <p:nvSpPr>
-          <p:cNvPr id="14" name="TextBox 13"/>
+          <p:cNvPr id="3" name="TextBox 2">
+            <a:extLst>
+              <a:ext uri="{FF2B5EF4-FFF2-40B4-BE49-F238E27FC236}">
+                <a16:creationId xmlns:a16="http://schemas.microsoft.com/office/drawing/2014/main" id="{24D884CF-4455-C36B-2EAE-115C79CDF92C}"/>
+              </a:ext>
+            </a:extLst>
+          </p:cNvPr>
           <p:cNvSpPr txBox="1"/>
           <p:nvPr/>
         </p:nvSpPr>
         <p:spPr>
           <a:xfrm>
-            <a:off x="4544568" y="2697480"/>
-            <a:ext cx="457200" cy="274320"/>
+            <a:off x="1223030" y="542673"/>
+            <a:ext cx="370294" cy="130805"/>
+          </a:xfrm>
+          <a:prstGeom prst="rect">
+            <a:avLst/>
+          </a:prstGeom>
+          <a:noFill/>
+        </p:spPr>
+        <p:txBody>
+          <a:bodyPr wrap="none" lIns="0" tIns="0" rIns="0" bIns="0" anchor="ctr">
+            <a:spAutoFit/>
+          </a:bodyPr>
+          <a:lstStyle/>
+          <a:p>
+            <a:pPr algn="ctr"/>
+            <a:r>
+              <a:rPr lang="de-CH" sz="850" b="1" dirty="0">
+                <a:solidFill>
+                  <a:srgbClr val="737373"/>
+                </a:solidFill>
+                <a:latin typeface="Aptos"/>
+              </a:rPr>
+              <a:t>Theorie</a:t>
+            </a:r>
+            <a:endParaRPr sz="850" b="1" dirty="0">
+              <a:solidFill>
+                <a:srgbClr val="737373"/>
+              </a:solidFill>
+              <a:latin typeface="Aptos"/>
+            </a:endParaRPr>
+          </a:p>
+        </p:txBody>
+      </p:sp>
+      <p:sp>
+        <p:nvSpPr>
+          <p:cNvPr id="4" name="TextBox 3">
+            <a:extLst>
+              <a:ext uri="{FF2B5EF4-FFF2-40B4-BE49-F238E27FC236}">
+                <a16:creationId xmlns:a16="http://schemas.microsoft.com/office/drawing/2014/main" id="{CC817772-D37D-FA9E-E5E8-B52D15A35F77}"/>
+              </a:ext>
+            </a:extLst>
+          </p:cNvPr>
+          <p:cNvSpPr txBox="1"/>
+          <p:nvPr/>
+        </p:nvSpPr>
+        <p:spPr>
+          <a:xfrm>
+            <a:off x="594360" y="932688"/>
+            <a:ext cx="5507533" cy="477054"/>
           </a:xfrm>
           <a:prstGeom prst="rect">
             <a:avLst/>
@@ -7322,108 +8920,80 @@
           <a:p>
             <a:pPr algn="l"/>
             <a:r>
-              <a:rPr sz="1000" b="1">
-                <a:solidFill>
-                  <a:srgbClr val="737373"/>
-                </a:solidFill>
-                <a:latin typeface="Aptos"/>
-              </a:rPr>
-              <a:t>02</a:t>
-            </a:r>
-          </a:p>
-        </p:txBody>
-      </p:sp>
-      <p:sp>
-        <p:nvSpPr>
-          <p:cNvPr id="15" name="TextBox 14"/>
-          <p:cNvSpPr txBox="1"/>
-          <p:nvPr/>
-        </p:nvSpPr>
-        <p:spPr>
-          <a:xfrm>
-            <a:off x="4544568" y="3246120"/>
-            <a:ext cx="2788920" cy="731520"/>
-          </a:xfrm>
-          <a:prstGeom prst="rect">
-            <a:avLst/>
-          </a:prstGeom>
-          <a:noFill/>
-        </p:spPr>
-        <p:txBody>
-          <a:bodyPr wrap="none" lIns="0" tIns="0" rIns="0" bIns="0" anchor="t">
-            <a:spAutoFit/>
-          </a:bodyPr>
-          <a:lstStyle/>
-          <a:p>
-            <a:pPr algn="l"/>
-            <a:r>
-              <a:rPr sz="1800" b="1">
+              <a:rPr lang="de-CH" sz="3100" b="1" dirty="0">
                 <a:solidFill>
                   <a:srgbClr val="171717"/>
                 </a:solidFill>
                 <a:latin typeface="Aptos"/>
               </a:rPr>
-              <a:t>[Kernaussage 2]</a:t>
-            </a:r>
-          </a:p>
-        </p:txBody>
-      </p:sp>
-      <p:sp>
-        <p:nvSpPr>
-          <p:cNvPr id="16" name="Rounded Rectangle 15"/>
-          <p:cNvSpPr/>
-          <p:nvPr/>
-        </p:nvSpPr>
-        <p:spPr>
-          <a:xfrm>
-            <a:off x="8001000" y="2423160"/>
-            <a:ext cx="3401568" cy="2057400"/>
-          </a:xfrm>
-          <a:prstGeom prst="roundRect">
-            <a:avLst/>
-          </a:prstGeom>
-          <a:solidFill>
-            <a:srgbClr val="FFFFFF"/>
-          </a:solidFill>
-          <a:ln w="10160">
+              <a:t>Flächen und Volumenintegrale</a:t>
+            </a:r>
+            <a:endParaRPr sz="3100" b="1" dirty="0">
+              <a:solidFill>
+                <a:srgbClr val="171717"/>
+              </a:solidFill>
+              <a:latin typeface="Aptos"/>
+            </a:endParaRPr>
+          </a:p>
+        </p:txBody>
+      </p:sp>
+      <p:cxnSp>
+        <p:nvCxnSpPr>
+          <p:cNvPr id="6" name="Connector 5">
+            <a:extLst>
+              <a:ext uri="{FF2B5EF4-FFF2-40B4-BE49-F238E27FC236}">
+                <a16:creationId xmlns:a16="http://schemas.microsoft.com/office/drawing/2014/main" id="{F39F216A-811A-77A3-5244-9B8627F57C8A}"/>
+              </a:ext>
+            </a:extLst>
+          </p:cNvPr>
+          <p:cNvCxnSpPr/>
+          <p:nvPr/>
+        </p:nvCxnSpPr>
+        <p:spPr>
+          <a:xfrm>
+            <a:off x="594360" y="6446520"/>
+            <a:ext cx="10972800" cy="0"/>
+          </a:xfrm>
+          <a:prstGeom prst="line">
+            <a:avLst/>
+          </a:prstGeom>
+          <a:ln w="12700">
             <a:solidFill>
               <a:srgbClr val="E8E8E5"/>
             </a:solidFill>
           </a:ln>
         </p:spPr>
         <p:style>
-          <a:lnRef idx="1">
+          <a:lnRef idx="2">
             <a:schemeClr val="accent1"/>
           </a:lnRef>
-          <a:fillRef idx="3">
+          <a:fillRef idx="0">
             <a:schemeClr val="accent1"/>
           </a:fillRef>
-          <a:effectRef idx="2">
+          <a:effectRef idx="1">
             <a:schemeClr val="accent1"/>
           </a:effectRef>
           <a:fontRef idx="minor">
-            <a:schemeClr val="lt1"/>
+            <a:schemeClr val="tx1"/>
           </a:fontRef>
         </p:style>
-        <p:txBody>
-          <a:bodyPr rtlCol="0" anchor="ctr"/>
-          <a:lstStyle/>
-          <a:p>
-            <a:pPr algn="ctr"/>
-            <a:endParaRPr/>
-          </a:p>
-        </p:txBody>
-      </p:sp>
-      <p:sp>
-        <p:nvSpPr>
-          <p:cNvPr id="17" name="TextBox 16"/>
+      </p:cxnSp>
+      <p:sp>
+        <p:nvSpPr>
+          <p:cNvPr id="7" name="TextBox 6">
+            <a:extLst>
+              <a:ext uri="{FF2B5EF4-FFF2-40B4-BE49-F238E27FC236}">
+                <a16:creationId xmlns:a16="http://schemas.microsoft.com/office/drawing/2014/main" id="{BCA116D9-255A-FA8C-B4DA-C92D8232B129}"/>
+              </a:ext>
+            </a:extLst>
+          </p:cNvPr>
           <p:cNvSpPr txBox="1"/>
           <p:nvPr/>
         </p:nvSpPr>
         <p:spPr>
           <a:xfrm>
-            <a:off x="8247888" y="2697480"/>
-            <a:ext cx="457200" cy="274320"/>
+            <a:off x="594360" y="6492240"/>
+            <a:ext cx="1554480" cy="201168"/>
           </a:xfrm>
           <a:prstGeom prst="rect">
             <a:avLst/>
@@ -7438,27 +9008,33 @@
           <a:p>
             <a:pPr algn="l"/>
             <a:r>
-              <a:rPr sz="1000" b="1">
+              <a:rPr sz="850" b="1">
                 <a:solidFill>
                   <a:srgbClr val="737373"/>
                 </a:solidFill>
                 <a:latin typeface="Aptos"/>
               </a:rPr>
-              <a:t>03</a:t>
-            </a:r>
-          </a:p>
-        </p:txBody>
-      </p:sp>
-      <p:sp>
-        <p:nvSpPr>
-          <p:cNvPr id="18" name="TextBox 17"/>
+              <a:t>NUS1 · ÜBUNG</a:t>
+            </a:r>
+          </a:p>
+        </p:txBody>
+      </p:sp>
+      <p:sp>
+        <p:nvSpPr>
+          <p:cNvPr id="8" name="TextBox 7">
+            <a:extLst>
+              <a:ext uri="{FF2B5EF4-FFF2-40B4-BE49-F238E27FC236}">
+                <a16:creationId xmlns:a16="http://schemas.microsoft.com/office/drawing/2014/main" id="{AF60B34B-81F7-8954-D5FF-FD26B994E2A7}"/>
+              </a:ext>
+            </a:extLst>
+          </p:cNvPr>
           <p:cNvSpPr txBox="1"/>
           <p:nvPr/>
         </p:nvSpPr>
         <p:spPr>
           <a:xfrm>
-            <a:off x="8247888" y="3246120"/>
-            <a:ext cx="2788920" cy="731520"/>
+            <a:off x="10074075" y="6492240"/>
+            <a:ext cx="578685" cy="130805"/>
           </a:xfrm>
           <a:prstGeom prst="rect">
             <a:avLst/>
@@ -7471,29 +9047,35 @@
           </a:bodyPr>
           <a:lstStyle/>
           <a:p>
-            <a:pPr algn="l"/>
-            <a:r>
-              <a:rPr sz="1800" b="1">
-                <a:solidFill>
-                  <a:srgbClr val="171717"/>
-                </a:solidFill>
-                <a:latin typeface="Aptos"/>
-              </a:rPr>
-              <a:t>[Kernaussage 3]</a:t>
-            </a:r>
-          </a:p>
-        </p:txBody>
-      </p:sp>
-      <p:sp>
-        <p:nvSpPr>
-          <p:cNvPr id="19" name="TextBox 18"/>
+            <a:pPr algn="r"/>
+            <a:r>
+              <a:rPr sz="850" b="0" dirty="0">
+                <a:solidFill>
+                  <a:srgbClr val="737373"/>
+                </a:solidFill>
+                <a:latin typeface="Aptos"/>
+              </a:rPr>
+              <a:t>Enrico Putzi </a:t>
+            </a:r>
+          </a:p>
+        </p:txBody>
+      </p:sp>
+      <p:sp>
+        <p:nvSpPr>
+          <p:cNvPr id="9" name="TextBox 8">
+            <a:extLst>
+              <a:ext uri="{FF2B5EF4-FFF2-40B4-BE49-F238E27FC236}">
+                <a16:creationId xmlns:a16="http://schemas.microsoft.com/office/drawing/2014/main" id="{F4ABC908-8EA5-9736-2AD7-5D5944F25F2B}"/>
+              </a:ext>
+            </a:extLst>
+          </p:cNvPr>
           <p:cNvSpPr txBox="1"/>
           <p:nvPr/>
         </p:nvSpPr>
         <p:spPr>
           <a:xfrm>
-            <a:off x="621792" y="5074920"/>
-            <a:ext cx="1828800" cy="457200"/>
+            <a:off x="10835640" y="6492240"/>
+            <a:ext cx="731520" cy="201168"/>
           </a:xfrm>
           <a:prstGeom prst="rect">
             <a:avLst/>
@@ -7506,29 +9088,35 @@
           </a:bodyPr>
           <a:lstStyle/>
           <a:p>
-            <a:pPr algn="l"/>
-            <a:r>
-              <a:rPr sz="2300" b="1">
-                <a:solidFill>
-                  <a:srgbClr val="171717"/>
-                </a:solidFill>
-                <a:latin typeface="Aptos"/>
-              </a:rPr>
-              <a:t>Fragen?</a:t>
-            </a:r>
-          </a:p>
-        </p:txBody>
-      </p:sp>
-      <p:sp>
-        <p:nvSpPr>
-          <p:cNvPr id="20" name="TextBox 19"/>
+            <a:pPr algn="r"/>
+            <a:r>
+              <a:rPr sz="850" b="1">
+                <a:solidFill>
+                  <a:srgbClr val="737373"/>
+                </a:solidFill>
+                <a:latin typeface="Aptos"/>
+              </a:rPr>
+              <a:t>W01</a:t>
+            </a:r>
+          </a:p>
+        </p:txBody>
+      </p:sp>
+      <p:sp>
+        <p:nvSpPr>
+          <p:cNvPr id="18" name="TextBox 10">
+            <a:extLst>
+              <a:ext uri="{FF2B5EF4-FFF2-40B4-BE49-F238E27FC236}">
+                <a16:creationId xmlns:a16="http://schemas.microsoft.com/office/drawing/2014/main" id="{22731E41-9ABB-305E-4797-E6C4F602D33C}"/>
+              </a:ext>
+            </a:extLst>
+          </p:cNvPr>
           <p:cNvSpPr txBox="1"/>
           <p:nvPr/>
         </p:nvSpPr>
         <p:spPr>
           <a:xfrm>
-            <a:off x="640080" y="5532120"/>
-            <a:ext cx="4572000" cy="274320"/>
+            <a:off x="612648" y="2799470"/>
+            <a:ext cx="4482830" cy="2154436"/>
           </a:xfrm>
           <a:prstGeom prst="rect">
             <a:avLst/>
@@ -7541,108 +9129,209 @@
           </a:bodyPr>
           <a:lstStyle/>
           <a:p>
-            <a:pPr algn="l"/>
-            <a:r>
-              <a:rPr sz="1050" b="0">
-                <a:solidFill>
-                  <a:srgbClr val="737373"/>
-                </a:solidFill>
-                <a:latin typeface="Aptos"/>
-              </a:rPr>
-              <a:t>[QR / Link zum Fragen-Tool]</a:t>
-            </a:r>
-          </a:p>
-        </p:txBody>
-      </p:sp>
-    </p:spTree>
-  </p:cSld>
-  <p:clrMapOvr>
-    <a:masterClrMapping/>
-  </p:clrMapOvr>
-</p:sld>
-</file>
-
-<file path=ppt/slides/slide9.xml><?xml version="1.0" encoding="utf-8"?>
-<p:sld xmlns:a="http://schemas.openxmlformats.org/drawingml/2006/main" xmlns:r="http://schemas.openxmlformats.org/officeDocument/2006/relationships" xmlns:p="http://schemas.openxmlformats.org/presentationml/2006/main">
-  <p:cSld>
-    <p:bg>
-      <p:bgPr>
-        <a:solidFill>
-          <a:srgbClr val="EEEEEA"/>
-        </a:solidFill>
-        <a:effectLst/>
-      </p:bgPr>
-    </p:bg>
-    <p:spTree>
-      <p:nvGrpSpPr>
-        <p:cNvPr id="1" name=""/>
-        <p:cNvGrpSpPr/>
-        <p:nvPr/>
-      </p:nvGrpSpPr>
-      <p:grpSpPr>
-        <a:xfrm>
-          <a:off x="0" y="0"/>
-          <a:ext cx="0" cy="0"/>
-          <a:chOff x="0" y="0"/>
-          <a:chExt cx="0" cy="0"/>
-        </a:xfrm>
-      </p:grpSpPr>
-      <p:sp>
-        <p:nvSpPr>
-          <p:cNvPr id="2" name="Rounded Rectangle 1"/>
-          <p:cNvSpPr/>
-          <p:nvPr/>
-        </p:nvSpPr>
-        <p:spPr>
-          <a:xfrm>
-            <a:off x="594360" y="502920"/>
-            <a:ext cx="1828800" cy="292608"/>
-          </a:xfrm>
-          <a:prstGeom prst="roundRect">
-            <a:avLst/>
-          </a:prstGeom>
-          <a:solidFill>
-            <a:srgbClr val="171717"/>
-          </a:solidFill>
-          <a:ln w="10160">
-            <a:solidFill>
-              <a:srgbClr val="171717"/>
-            </a:solidFill>
-          </a:ln>
-        </p:spPr>
-        <p:style>
-          <a:lnRef idx="1">
-            <a:schemeClr val="accent1"/>
-          </a:lnRef>
-          <a:fillRef idx="3">
-            <a:schemeClr val="accent1"/>
-          </a:fillRef>
-          <a:effectRef idx="2">
-            <a:schemeClr val="accent1"/>
-          </a:effectRef>
-          <a:fontRef idx="minor">
-            <a:schemeClr val="lt1"/>
-          </a:fontRef>
-        </p:style>
-        <p:txBody>
-          <a:bodyPr rtlCol="0" anchor="ctr"/>
-          <a:lstStyle/>
-          <a:p>
-            <a:pPr algn="ctr"/>
-            <a:endParaRPr/>
-          </a:p>
-        </p:txBody>
-      </p:sp>
-      <p:sp>
-        <p:nvSpPr>
-          <p:cNvPr id="3" name="TextBox 2"/>
+            <a:pPr marL="342900" indent="-342900" algn="l">
+              <a:buFont typeface="Arial" panose="020B0604020202020204" pitchFamily="34" charset="0"/>
+              <a:buChar char="•"/>
+            </a:pPr>
+            <a:r>
+              <a:rPr lang="de-CH" sz="2000" dirty="0">
+                <a:solidFill>
+                  <a:srgbClr val="171717"/>
+                </a:solidFill>
+                <a:latin typeface="Aptos"/>
+              </a:rPr>
+              <a:t>Keine Angst, ihr müsst keine komplett</a:t>
+            </a:r>
+            <a:br>
+              <a:rPr lang="de-CH" sz="2000" dirty="0">
+                <a:solidFill>
+                  <a:srgbClr val="171717"/>
+                </a:solidFill>
+                <a:latin typeface="Aptos"/>
+              </a:rPr>
+            </a:br>
+            <a:r>
+              <a:rPr lang="de-CH" sz="2000" dirty="0">
+                <a:solidFill>
+                  <a:srgbClr val="171717"/>
+                </a:solidFill>
+                <a:latin typeface="Aptos"/>
+              </a:rPr>
+              <a:t>ausrechnen (in NUS1)</a:t>
+            </a:r>
+          </a:p>
+          <a:p>
+            <a:pPr marL="342900" indent="-342900" algn="l">
+              <a:buFont typeface="Arial" panose="020B0604020202020204" pitchFamily="34" charset="0"/>
+              <a:buChar char="•"/>
+            </a:pPr>
+            <a:r>
+              <a:rPr lang="de-CH" sz="2000" dirty="0">
+                <a:solidFill>
+                  <a:srgbClr val="171717"/>
+                </a:solidFill>
+                <a:latin typeface="Aptos"/>
+              </a:rPr>
+              <a:t>Immer Möglich zu vereinfachen</a:t>
+            </a:r>
+          </a:p>
+          <a:p>
+            <a:pPr marL="342900" indent="-342900" algn="l">
+              <a:buFont typeface="Arial" panose="020B0604020202020204" pitchFamily="34" charset="0"/>
+              <a:buChar char="•"/>
+            </a:pPr>
+            <a:endParaRPr lang="de-CH" sz="2000" dirty="0">
+              <a:solidFill>
+                <a:srgbClr val="171717"/>
+              </a:solidFill>
+              <a:latin typeface="Aptos"/>
+            </a:endParaRPr>
+          </a:p>
+          <a:p>
+            <a:pPr marL="342900" indent="-342900" algn="l">
+              <a:buFont typeface="Arial" panose="020B0604020202020204" pitchFamily="34" charset="0"/>
+              <a:buChar char="•"/>
+            </a:pPr>
+            <a:endParaRPr lang="de-CH" sz="2000" dirty="0">
+              <a:solidFill>
+                <a:srgbClr val="171717"/>
+              </a:solidFill>
+              <a:latin typeface="Aptos"/>
+            </a:endParaRPr>
+          </a:p>
+          <a:p>
+            <a:pPr marL="342900" indent="-342900" algn="l">
+              <a:buFont typeface="Arial" panose="020B0604020202020204" pitchFamily="34" charset="0"/>
+              <a:buChar char="•"/>
+            </a:pPr>
+            <a:endParaRPr lang="de-CH" sz="2000" dirty="0">
+              <a:solidFill>
+                <a:srgbClr val="171717"/>
+              </a:solidFill>
+              <a:latin typeface="Aptos"/>
+            </a:endParaRPr>
+          </a:p>
+          <a:p>
+            <a:pPr marL="342900" indent="-342900" algn="l">
+              <a:buFont typeface="Arial" panose="020B0604020202020204" pitchFamily="34" charset="0"/>
+              <a:buChar char="•"/>
+            </a:pPr>
+            <a:endParaRPr sz="2000" b="0" dirty="0">
+              <a:solidFill>
+                <a:srgbClr val="171717"/>
+              </a:solidFill>
+              <a:latin typeface="Aptos"/>
+            </a:endParaRPr>
+          </a:p>
+        </p:txBody>
+      </p:sp>
+      <p:pic>
+        <p:nvPicPr>
+          <p:cNvPr id="13" name="Grafik 12">
+            <a:extLst>
+              <a:ext uri="{FF2B5EF4-FFF2-40B4-BE49-F238E27FC236}">
+                <a16:creationId xmlns:a16="http://schemas.microsoft.com/office/drawing/2014/main" id="{18A76841-8603-2986-F688-7978E273ED55}"/>
+              </a:ext>
+            </a:extLst>
+          </p:cNvPr>
+          <p:cNvPicPr>
+            <a:picLocks noChangeAspect="1"/>
+          </p:cNvPicPr>
+          <p:nvPr/>
+        </p:nvPicPr>
+        <p:blipFill>
+          <a:blip r:embed="rId3"/>
+          <a:stretch>
+            <a:fillRect/>
+          </a:stretch>
+        </p:blipFill>
+        <p:spPr>
+          <a:xfrm>
+            <a:off x="6385018" y="1744110"/>
+            <a:ext cx="1772292" cy="805589"/>
+          </a:xfrm>
+          <a:prstGeom prst="rect">
+            <a:avLst/>
+          </a:prstGeom>
+        </p:spPr>
+      </p:pic>
+      <p:pic>
+        <p:nvPicPr>
+          <p:cNvPr id="15" name="Grafik 14">
+            <a:extLst>
+              <a:ext uri="{FF2B5EF4-FFF2-40B4-BE49-F238E27FC236}">
+                <a16:creationId xmlns:a16="http://schemas.microsoft.com/office/drawing/2014/main" id="{0880FA70-39D7-900C-29DC-640E0918DAC4}"/>
+              </a:ext>
+            </a:extLst>
+          </p:cNvPr>
+          <p:cNvPicPr>
+            <a:picLocks noChangeAspect="1"/>
+          </p:cNvPicPr>
+          <p:nvPr/>
+        </p:nvPicPr>
+        <p:blipFill>
+          <a:blip r:embed="rId4"/>
+          <a:stretch>
+            <a:fillRect/>
+          </a:stretch>
+        </p:blipFill>
+        <p:spPr>
+          <a:xfrm>
+            <a:off x="8401446" y="1744110"/>
+            <a:ext cx="1878627" cy="773554"/>
+          </a:xfrm>
+          <a:prstGeom prst="rect">
+            <a:avLst/>
+          </a:prstGeom>
+        </p:spPr>
+      </p:pic>
+      <p:pic>
+        <p:nvPicPr>
+          <p:cNvPr id="16" name="Grafik 15" descr="This Is Fine creator explains the timelessness of his meme | The Verge">
+            <a:extLst>
+              <a:ext uri="{FF2B5EF4-FFF2-40B4-BE49-F238E27FC236}">
+                <a16:creationId xmlns:a16="http://schemas.microsoft.com/office/drawing/2014/main" id="{DA3DAAA1-F075-03EA-F40B-F9B39BAD6C2C}"/>
+              </a:ext>
+            </a:extLst>
+          </p:cNvPr>
+          <p:cNvPicPr>
+            <a:picLocks noChangeAspect="1"/>
+          </p:cNvPicPr>
+          <p:nvPr/>
+        </p:nvPicPr>
+        <p:blipFill>
+          <a:blip r:embed="rId5"/>
+          <a:srcRect t="21459" b="19971"/>
+          <a:stretch>
+            <a:fillRect/>
+          </a:stretch>
+        </p:blipFill>
+        <p:spPr>
+          <a:xfrm>
+            <a:off x="6095999" y="2595418"/>
+            <a:ext cx="4714875" cy="2789382"/>
+          </a:xfrm>
+          <a:prstGeom prst="rect">
+            <a:avLst/>
+          </a:prstGeom>
+        </p:spPr>
+      </p:pic>
+      <p:sp>
+        <p:nvSpPr>
+          <p:cNvPr id="19" name="Textfeld 18">
+            <a:extLst>
+              <a:ext uri="{FF2B5EF4-FFF2-40B4-BE49-F238E27FC236}">
+                <a16:creationId xmlns:a16="http://schemas.microsoft.com/office/drawing/2014/main" id="{8054E313-A632-CAEF-5AA0-3180017514C3}"/>
+              </a:ext>
+            </a:extLst>
+          </p:cNvPr>
           <p:cNvSpPr txBox="1"/>
           <p:nvPr/>
         </p:nvSpPr>
         <p:spPr>
           <a:xfrm>
-            <a:off x="594360" y="512064"/>
-            <a:ext cx="1828800" cy="246888"/>
+            <a:off x="594360" y="5266416"/>
+            <a:ext cx="6096000" cy="1077218"/>
           </a:xfrm>
           <a:prstGeom prst="rect">
             <a:avLst/>
@@ -7650,368 +9339,58 @@
           <a:noFill/>
         </p:spPr>
         <p:txBody>
-          <a:bodyPr wrap="none" lIns="0" tIns="0" rIns="0" bIns="0" anchor="ctr">
+          <a:bodyPr wrap="square">
             <a:spAutoFit/>
           </a:bodyPr>
           <a:lstStyle/>
           <a:p>
-            <a:pPr algn="ctr"/>
-            <a:r>
-              <a:rPr sz="850" b="1">
-                <a:solidFill>
-                  <a:srgbClr val="FFFFFF"/>
-                </a:solidFill>
-                <a:latin typeface="Aptos"/>
-              </a:rPr>
-              <a:t>MASTER · NICHT PRÄSENTIEREN</a:t>
-            </a:r>
-          </a:p>
-        </p:txBody>
-      </p:sp>
-      <p:sp>
-        <p:nvSpPr>
-          <p:cNvPr id="4" name="TextBox 3"/>
-          <p:cNvSpPr txBox="1"/>
-          <p:nvPr/>
-        </p:nvSpPr>
-        <p:spPr>
-          <a:xfrm>
-            <a:off x="594360" y="1078992"/>
-            <a:ext cx="6400800" cy="594360"/>
-          </a:xfrm>
-          <a:prstGeom prst="rect">
-            <a:avLst/>
-          </a:prstGeom>
-          <a:noFill/>
-        </p:spPr>
-        <p:txBody>
-          <a:bodyPr wrap="none" lIns="0" tIns="0" rIns="0" bIns="0" anchor="t">
-            <a:spAutoFit/>
-          </a:bodyPr>
-          <a:lstStyle/>
-          <a:p>
-            <a:pPr algn="l"/>
-            <a:r>
-              <a:rPr sz="3100" b="1">
-                <a:solidFill>
-                  <a:srgbClr val="171717"/>
-                </a:solidFill>
-                <a:latin typeface="Aptos"/>
-              </a:rPr>
-              <a:t>Dein Standard</a:t>
-            </a:r>
-          </a:p>
-        </p:txBody>
-      </p:sp>
-      <p:sp>
-        <p:nvSpPr>
-          <p:cNvPr id="5" name="TextBox 4"/>
-          <p:cNvSpPr txBox="1"/>
-          <p:nvPr/>
-        </p:nvSpPr>
-        <p:spPr>
-          <a:xfrm>
-            <a:off x="621792" y="1737360"/>
-            <a:ext cx="8046720" cy="365760"/>
-          </a:xfrm>
-          <a:prstGeom prst="rect">
-            <a:avLst/>
-          </a:prstGeom>
-          <a:noFill/>
-        </p:spPr>
-        <p:txBody>
-          <a:bodyPr wrap="none" lIns="0" tIns="0" rIns="0" bIns="0" anchor="t">
-            <a:spAutoFit/>
-          </a:bodyPr>
-          <a:lstStyle/>
-          <a:p>
-            <a:pPr algn="l"/>
-            <a:r>
-              <a:rPr sz="1350" b="0">
-                <a:solidFill>
-                  <a:srgbClr val="737373"/>
-                </a:solidFill>
-                <a:latin typeface="Aptos"/>
-              </a:rPr>
-              <a:t>Nicht jede Folie neu erfinden. 80 % der Zeit nur Inhalte ersetzen.</a:t>
-            </a:r>
-          </a:p>
-        </p:txBody>
-      </p:sp>
-      <p:sp>
-        <p:nvSpPr>
-          <p:cNvPr id="6" name="Rounded Rectangle 5"/>
-          <p:cNvSpPr/>
-          <p:nvPr/>
-        </p:nvSpPr>
-        <p:spPr>
-          <a:xfrm>
-            <a:off x="621792" y="2395728"/>
-            <a:ext cx="5349240" cy="2331720"/>
-          </a:xfrm>
-          <a:prstGeom prst="roundRect">
-            <a:avLst/>
-          </a:prstGeom>
-          <a:solidFill>
-            <a:srgbClr val="FFFFFF"/>
-          </a:solidFill>
-          <a:ln w="10160">
-            <a:solidFill>
-              <a:srgbClr val="E8E8E5"/>
-            </a:solidFill>
-          </a:ln>
-        </p:spPr>
-        <p:style>
-          <a:lnRef idx="1">
-            <a:schemeClr val="accent1"/>
-          </a:lnRef>
-          <a:fillRef idx="3">
-            <a:schemeClr val="accent1"/>
-          </a:fillRef>
-          <a:effectRef idx="2">
-            <a:schemeClr val="accent1"/>
-          </a:effectRef>
-          <a:fontRef idx="minor">
-            <a:schemeClr val="lt1"/>
-          </a:fontRef>
-        </p:style>
-        <p:txBody>
-          <a:bodyPr rtlCol="0" anchor="ctr"/>
-          <a:lstStyle/>
-          <a:p>
-            <a:pPr algn="ctr"/>
-            <a:endParaRPr/>
-          </a:p>
-        </p:txBody>
-      </p:sp>
-      <p:sp>
-        <p:nvSpPr>
-          <p:cNvPr id="7" name="TextBox 6"/>
-          <p:cNvSpPr txBox="1"/>
-          <p:nvPr/>
-        </p:nvSpPr>
-        <p:spPr>
-          <a:xfrm>
-            <a:off x="896112" y="2679192"/>
-            <a:ext cx="914400" cy="320040"/>
-          </a:xfrm>
-          <a:prstGeom prst="rect">
-            <a:avLst/>
-          </a:prstGeom>
-          <a:noFill/>
-        </p:spPr>
-        <p:txBody>
-          <a:bodyPr wrap="none" lIns="0" tIns="0" rIns="0" bIns="0" anchor="t">
-            <a:spAutoFit/>
-          </a:bodyPr>
-          <a:lstStyle/>
-          <a:p>
-            <a:pPr algn="l"/>
-            <a:r>
-              <a:rPr sz="1500" b="1">
-                <a:solidFill>
-                  <a:srgbClr val="171717"/>
-                </a:solidFill>
-                <a:latin typeface="Aptos"/>
-              </a:rPr>
-              <a:t>Regel</a:t>
-            </a:r>
-          </a:p>
-        </p:txBody>
-      </p:sp>
-      <p:sp>
-        <p:nvSpPr>
-          <p:cNvPr id="8" name="TextBox 7"/>
-          <p:cNvSpPr txBox="1"/>
-          <p:nvPr/>
-        </p:nvSpPr>
-        <p:spPr>
-          <a:xfrm>
-            <a:off x="896112" y="3154680"/>
-            <a:ext cx="4526280" cy="1234440"/>
-          </a:xfrm>
-          <a:prstGeom prst="rect">
-            <a:avLst/>
-          </a:prstGeom>
-          <a:noFill/>
-        </p:spPr>
-        <p:txBody>
-          <a:bodyPr wrap="none" lIns="0" tIns="0" rIns="0" bIns="0" anchor="t">
-            <a:spAutoFit/>
-          </a:bodyPr>
-          <a:lstStyle/>
-          <a:p>
-            <a:pPr algn="l"/>
-            <a:r>
-              <a:rPr sz="1400" b="0">
-                <a:solidFill>
-                  <a:srgbClr val="171717"/>
-                </a:solidFill>
-                <a:latin typeface="Aptos"/>
-              </a:rPr>
-              <a:t>1. Eine klare Struktur
-2. Links Text, rechts Visual
-3. Grosse Schaltungen / Fotos
-4. Wenig Text
-5. GoodNotes = live erklären</a:t>
-            </a:r>
-          </a:p>
-        </p:txBody>
-      </p:sp>
-      <p:sp>
-        <p:nvSpPr>
-          <p:cNvPr id="9" name="Rounded Rectangle 8"/>
-          <p:cNvSpPr/>
-          <p:nvPr/>
-        </p:nvSpPr>
-        <p:spPr>
-          <a:xfrm>
-            <a:off x="6144768" y="2395728"/>
-            <a:ext cx="5422392" cy="2331720"/>
-          </a:xfrm>
-          <a:prstGeom prst="roundRect">
-            <a:avLst/>
-          </a:prstGeom>
-          <a:solidFill>
-            <a:srgbClr val="FFFFFF"/>
-          </a:solidFill>
-          <a:ln w="10160">
-            <a:solidFill>
-              <a:srgbClr val="E8E8E5"/>
-            </a:solidFill>
-          </a:ln>
-        </p:spPr>
-        <p:style>
-          <a:lnRef idx="1">
-            <a:schemeClr val="accent1"/>
-          </a:lnRef>
-          <a:fillRef idx="3">
-            <a:schemeClr val="accent1"/>
-          </a:fillRef>
-          <a:effectRef idx="2">
-            <a:schemeClr val="accent1"/>
-          </a:effectRef>
-          <a:fontRef idx="minor">
-            <a:schemeClr val="lt1"/>
-          </a:fontRef>
-        </p:style>
-        <p:txBody>
-          <a:bodyPr rtlCol="0" anchor="ctr"/>
-          <a:lstStyle/>
-          <a:p>
-            <a:pPr algn="ctr"/>
-            <a:endParaRPr/>
-          </a:p>
-        </p:txBody>
-      </p:sp>
-      <p:sp>
-        <p:nvSpPr>
-          <p:cNvPr id="10" name="TextBox 9"/>
-          <p:cNvSpPr txBox="1"/>
-          <p:nvPr/>
-        </p:nvSpPr>
-        <p:spPr>
-          <a:xfrm>
-            <a:off x="6419088" y="2679192"/>
-            <a:ext cx="1371600" cy="320040"/>
-          </a:xfrm>
-          <a:prstGeom prst="rect">
-            <a:avLst/>
-          </a:prstGeom>
-          <a:noFill/>
-        </p:spPr>
-        <p:txBody>
-          <a:bodyPr wrap="none" lIns="0" tIns="0" rIns="0" bIns="0" anchor="t">
-            <a:spAutoFit/>
-          </a:bodyPr>
-          <a:lstStyle/>
-          <a:p>
-            <a:pPr algn="l"/>
-            <a:r>
-              <a:rPr sz="1500" b="1">
-                <a:solidFill>
-                  <a:srgbClr val="171717"/>
-                </a:solidFill>
-                <a:latin typeface="Aptos"/>
-              </a:rPr>
-              <a:t>Dateinamen</a:t>
-            </a:r>
-          </a:p>
-        </p:txBody>
-      </p:sp>
-      <p:sp>
-        <p:nvSpPr>
-          <p:cNvPr id="11" name="TextBox 10"/>
-          <p:cNvSpPr txBox="1"/>
-          <p:nvPr/>
-        </p:nvSpPr>
-        <p:spPr>
-          <a:xfrm>
-            <a:off x="6419088" y="3154680"/>
-            <a:ext cx="4480560" cy="1051560"/>
-          </a:xfrm>
-          <a:prstGeom prst="rect">
-            <a:avLst/>
-          </a:prstGeom>
-          <a:noFill/>
-        </p:spPr>
-        <p:txBody>
-          <a:bodyPr wrap="none" lIns="0" tIns="0" rIns="0" bIns="0" anchor="t">
-            <a:spAutoFit/>
-          </a:bodyPr>
-          <a:lstStyle/>
-          <a:p>
-            <a:pPr algn="l"/>
-            <a:r>
-              <a:rPr sz="1400" b="0">
-                <a:solidFill>
-                  <a:srgbClr val="171717"/>
-                </a:solidFill>
-                <a:latin typeface="Aptos"/>
-              </a:rPr>
-              <a:t>NUS1_W01_Uebung.pptx
-NUS1_W01_Slides.pdf
-NUS1_W01_Slides_Notes.pdf</a:t>
-            </a:r>
-          </a:p>
-        </p:txBody>
-      </p:sp>
-      <p:sp>
-        <p:nvSpPr>
-          <p:cNvPr id="12" name="TextBox 11"/>
-          <p:cNvSpPr txBox="1"/>
-          <p:nvPr/>
-        </p:nvSpPr>
-        <p:spPr>
-          <a:xfrm>
-            <a:off x="640080" y="5166360"/>
-            <a:ext cx="10515600" cy="411480"/>
-          </a:xfrm>
-          <a:prstGeom prst="rect">
-            <a:avLst/>
-          </a:prstGeom>
-          <a:noFill/>
-        </p:spPr>
-        <p:txBody>
-          <a:bodyPr wrap="none" lIns="0" tIns="0" rIns="0" bIns="0" anchor="t">
-            <a:spAutoFit/>
-          </a:bodyPr>
-          <a:lstStyle/>
-          <a:p>
-            <a:pPr algn="l"/>
-            <a:r>
-              <a:rPr sz="1500" b="1">
-                <a:solidFill>
-                  <a:srgbClr val="171717"/>
-                </a:solidFill>
-                <a:latin typeface="Aptos"/>
-              </a:rPr>
-              <a:t>Die Folien sollen vorbereiten — nicht die ganze Übung für dich sprechen.</a:t>
+            <a:r>
+              <a:rPr lang="de-CH" sz="1800" dirty="0"/>
+              <a:t>#04 – Vereinfachung Wegintegral </a:t>
+            </a:r>
+            <a:r>
+              <a:rPr lang="de-CH" sz="1400" dirty="0"/>
+              <a:t>(</a:t>
+            </a:r>
+            <a:r>
+              <a:rPr lang="de-CH" sz="1400" dirty="0">
+                <a:hlinkClick r:id="rId6"/>
+              </a:rPr>
+              <a:t>https://www.youtube.com/watch?v=A76JpF7ktCI</a:t>
+            </a:r>
+            <a:r>
+              <a:rPr lang="de-CH" sz="1400" dirty="0"/>
+              <a:t>)</a:t>
+            </a:r>
+          </a:p>
+          <a:p>
+            <a:r>
+              <a:rPr lang="de-CH" sz="1800" dirty="0"/>
+              <a:t>#03 – Vereinfachung Oberflächenintegral </a:t>
+            </a:r>
+            <a:r>
+              <a:rPr lang="de-CH" sz="1400" dirty="0"/>
+              <a:t>(</a:t>
+            </a:r>
+            <a:r>
+              <a:rPr lang="de-CH" sz="1400" dirty="0">
+                <a:hlinkClick r:id="rId7"/>
+              </a:rPr>
+              <a:t>https://www.youtube.com/watch?v=NlGysPeUliY</a:t>
+            </a:r>
+            <a:r>
+              <a:rPr lang="de-CH" sz="1400" dirty="0"/>
+              <a:t>) </a:t>
             </a:r>
           </a:p>
         </p:txBody>
       </p:sp>
     </p:spTree>
+    <p:extLst>
+      <p:ext uri="{BB962C8B-B14F-4D97-AF65-F5344CB8AC3E}">
+        <p14:creationId xmlns:p14="http://schemas.microsoft.com/office/powerpoint/2010/main" val="1021514222"/>
+      </p:ext>
+    </p:extLst>
   </p:cSld>
   <p:clrMapOvr>
     <a:masterClrMapping/>
